--- a/HMB1_SLT_Pareto_Ravinder_Singh.pptx
+++ b/HMB1_SLT_Pareto_Ravinder_Singh.pptx
@@ -3096,8 +3096,8 @@
         </p:nvSpPr>
         <p:spPr>
           <a:xfrm>
-            <a:off x="457200" y="274320"/>
-            <a:ext cx="11247120" cy="731520"/>
+            <a:off x="457200" y="182880"/>
+            <a:ext cx="11247120" cy="548640"/>
           </a:xfrm>
           <a:prstGeom prst="rect">
             <a:avLst/>
@@ -3111,14 +3111,14 @@
           <a:lstStyle/>
           <a:p>
             <a:pPr>
-              <a:defRPr sz="3200" b="1">
+              <a:defRPr sz="2800" b="1">
                 <a:solidFill>
                   <a:srgbClr val="003366"/>
                 </a:solidFill>
               </a:defRPr>
             </a:pPr>
             <a:r>
-              <a:t>HMB1 SLT Top Pareto Analysis</a:t>
+              <a:t>SLT Top Pareto Analysis (HMB1 + QMON)</a:t>
             </a:r>
           </a:p>
         </p:txBody>
@@ -3131,8 +3131,8 @@
         </p:nvSpPr>
         <p:spPr>
           <a:xfrm>
-            <a:off x="457200" y="914400"/>
-            <a:ext cx="11247120" cy="457200"/>
+            <a:off x="457200" y="685800"/>
+            <a:ext cx="11247120" cy="365760"/>
           </a:xfrm>
           <a:prstGeom prst="rect">
             <a:avLst/>
@@ -3146,14 +3146,14 @@
           <a:lstStyle/>
           <a:p>
             <a:pPr>
-              <a:defRPr sz="1800">
+              <a:defRPr sz="1400">
                 <a:solidFill>
                   <a:srgbClr val="646464"/>
                 </a:solidFill>
               </a:defRPr>
             </a:pPr>
             <a:r>
-              <a:t>SOCAMM2 | Y6CP | 7500MTPS | WW202606-202615</a:t>
+              <a:t>SOCAMM2 | Y6CP | 7500MTPS | WW202606-202615 (10 weeks)</a:t>
             </a:r>
           </a:p>
         </p:txBody>
@@ -3166,16 +3166,16 @@
         </p:nvSpPr>
         <p:spPr>
           <a:xfrm>
-            <a:off x="457200" y="1463040"/>
-            <a:ext cx="3657600" cy="1097280"/>
+            <a:off x="457200" y="1188720"/>
+            <a:ext cx="3657600" cy="1005840"/>
           </a:xfrm>
           <a:prstGeom prst="roundRect">
             <a:avLst/>
           </a:prstGeom>
           <a:solidFill>
-            <a:srgbClr val="F0F8FF"/>
+            <a:srgbClr val="E6F2FF"/>
           </a:solidFill>
-          <a:ln>
+          <a:ln w="25400">
             <a:solidFill>
               <a:srgbClr val="0070C0"/>
             </a:solidFill>
@@ -3211,16 +3211,16 @@
         </p:nvSpPr>
         <p:spPr>
           <a:xfrm>
-            <a:off x="548640" y="1554480"/>
-            <a:ext cx="3474720" cy="914400"/>
-          </a:xfrm>
-          <a:prstGeom prst="rect">
-            <a:avLst/>
-          </a:prstGeom>
-          <a:noFill/>
-        </p:spPr>
-        <p:txBody>
-          <a:bodyPr wrap="none">
+            <a:off x="548640" y="1280160"/>
+            <a:ext cx="3474720" cy="822960"/>
+          </a:xfrm>
+          <a:prstGeom prst="rect">
+            <a:avLst/>
+          </a:prstGeom>
+          <a:noFill/>
+        </p:spPr>
+        <p:txBody>
+          <a:bodyPr wrap="square">
             <a:spAutoFit/>
           </a:bodyPr>
           <a:lstStyle/>
@@ -3228,129 +3228,53 @@
             <a:pPr>
               <a:defRPr sz="1400" b="1">
                 <a:solidFill>
-                  <a:srgbClr val="003366"/>
+                  <a:srgbClr val="0070C0"/>
                 </a:solidFill>
               </a:defRPr>
             </a:pPr>
             <a:r>
-              <a:t>Population</a:t>
+              <a:t>HMB1</a:t>
             </a:r>
           </a:p>
           <a:p>
             <a:pPr>
-              <a:defRPr sz="1200"/>
-            </a:pPr>
-            <a:r>
-              <a:t>Total FID UIN: 1,947,264</a:t>
+              <a:defRPr sz="1000"/>
+            </a:pPr>
+            <a:r>
+              <a:t>FID UIN: 1,947,264</a:t>
             </a:r>
           </a:p>
           <a:p>
             <a:pPr>
-              <a:defRPr sz="1200"/>
-            </a:pPr>
-            <a:r>
-              <a:t>Unique Failing MSNs: 559</a:t>
-            </a:r>
-          </a:p>
-          <a:p>
-            <a:pPr>
-              <a:defRPr sz="1200" b="1"/>
-            </a:pPr>
-            <a:r>
-              <a:t>Total DPM: 287.1</a:t>
-            </a:r>
-          </a:p>
-        </p:txBody>
-      </p:sp>
-      <p:sp>
-        <p:nvSpPr>
-          <p:cNvPr id="6" name="TextBox 5"/>
-          <p:cNvSpPr txBox="1"/>
-          <p:nvPr/>
-        </p:nvSpPr>
-        <p:spPr>
-          <a:xfrm>
-            <a:off x="457200" y="2743200"/>
-            <a:ext cx="3657600" cy="365760"/>
-          </a:xfrm>
-          <a:prstGeom prst="rect">
-            <a:avLst/>
-          </a:prstGeom>
-          <a:noFill/>
-        </p:spPr>
-        <p:txBody>
-          <a:bodyPr wrap="none">
-            <a:spAutoFit/>
-          </a:bodyPr>
-          <a:lstStyle/>
-          <a:p>
-            <a:pPr>
-              <a:defRPr sz="1600" b="1">
-                <a:solidFill>
-                  <a:srgbClr val="003366"/>
-                </a:solidFill>
-              </a:defRPr>
-            </a:pPr>
-            <a:r>
-              <a:t>MSN_STATUS Pareto</a:t>
-            </a:r>
-          </a:p>
-        </p:txBody>
-      </p:sp>
-      <p:sp>
-        <p:nvSpPr>
-          <p:cNvPr id="7" name="TextBox 6"/>
-          <p:cNvSpPr txBox="1"/>
-          <p:nvPr/>
-        </p:nvSpPr>
-        <p:spPr>
-          <a:xfrm>
-            <a:off x="457200" y="3108960"/>
-            <a:ext cx="1097280" cy="274320"/>
-          </a:xfrm>
-          <a:prstGeom prst="rect">
-            <a:avLst/>
-          </a:prstGeom>
-          <a:noFill/>
-        </p:spPr>
-        <p:txBody>
-          <a:bodyPr wrap="none">
-            <a:spAutoFit/>
-          </a:bodyPr>
-          <a:lstStyle/>
-          <a:p>
-            <a:pPr>
-              <a:defRPr sz="1000" b="1">
-                <a:solidFill>
-                  <a:srgbClr val="FFFFFF"/>
-                </a:solidFill>
-              </a:defRPr>
-            </a:pPr>
-            <a:r>
-              <a:t>MSN_STATUS</a:t>
-            </a:r>
-          </a:p>
-        </p:txBody>
-      </p:sp>
-      <p:sp>
-        <p:nvSpPr>
-          <p:cNvPr id="8" name="Rectangle 7"/>
+              <a:defRPr sz="1100" b="1"/>
+            </a:pPr>
+            <a:r>
+              <a:t>Fails: 559 | DPM: 287.1</a:t>
+            </a:r>
+          </a:p>
+        </p:txBody>
+      </p:sp>
+      <p:sp>
+        <p:nvSpPr>
+          <p:cNvPr id="6" name="Rounded Rectangle 5"/>
           <p:cNvSpPr/>
           <p:nvPr/>
         </p:nvSpPr>
         <p:spPr>
           <a:xfrm>
-            <a:off x="457200" y="3108960"/>
-            <a:ext cx="1097280" cy="274320"/>
-          </a:xfrm>
-          <a:prstGeom prst="rect">
+            <a:off x="4297680" y="1188720"/>
+            <a:ext cx="3657600" cy="1005840"/>
+          </a:xfrm>
+          <a:prstGeom prst="roundRect">
             <a:avLst/>
           </a:prstGeom>
           <a:solidFill>
-            <a:srgbClr val="0070C0"/>
+            <a:srgbClr val="FFF0E6"/>
           </a:solidFill>
-          <a:ln>
-            <a:noFill/>
+          <a:ln w="25400">
+            <a:solidFill>
+              <a:srgbClr val="FF8C00"/>
+            </a:solidFill>
           </a:ln>
         </p:spPr>
         <p:style>
@@ -3377,58 +3301,76 @@
       </p:sp>
       <p:sp>
         <p:nvSpPr>
-          <p:cNvPr id="9" name="TextBox 8"/>
-          <p:cNvSpPr txBox="1"/>
-          <p:nvPr/>
-        </p:nvSpPr>
-        <p:spPr>
-          <a:xfrm>
-            <a:off x="1554480" y="3108960"/>
-            <a:ext cx="822960" cy="274320"/>
-          </a:xfrm>
-          <a:prstGeom prst="rect">
-            <a:avLst/>
-          </a:prstGeom>
-          <a:noFill/>
-        </p:spPr>
-        <p:txBody>
-          <a:bodyPr wrap="none">
+          <p:cNvPr id="7" name="TextBox 6"/>
+          <p:cNvSpPr txBox="1"/>
+          <p:nvPr/>
+        </p:nvSpPr>
+        <p:spPr>
+          <a:xfrm>
+            <a:off x="4389120" y="1280160"/>
+            <a:ext cx="3474720" cy="822960"/>
+          </a:xfrm>
+          <a:prstGeom prst="rect">
+            <a:avLst/>
+          </a:prstGeom>
+          <a:noFill/>
+        </p:spPr>
+        <p:txBody>
+          <a:bodyPr wrap="square">
             <a:spAutoFit/>
           </a:bodyPr>
           <a:lstStyle/>
           <a:p>
             <a:pPr>
-              <a:defRPr sz="1000" b="1">
+              <a:defRPr sz="1400" b="1">
                 <a:solidFill>
-                  <a:srgbClr val="FFFFFF"/>
+                  <a:srgbClr val="FF8C00"/>
                 </a:solidFill>
               </a:defRPr>
             </a:pPr>
             <a:r>
-              <a:t>Modules</a:t>
-            </a:r>
-          </a:p>
-        </p:txBody>
-      </p:sp>
-      <p:sp>
-        <p:nvSpPr>
-          <p:cNvPr id="10" name="Rectangle 9"/>
+              <a:t>QMON</a:t>
+            </a:r>
+          </a:p>
+          <a:p>
+            <a:pPr>
+              <a:defRPr sz="1000"/>
+            </a:pPr>
+            <a:r>
+              <a:t>FID UIN: 1,697,088</a:t>
+            </a:r>
+          </a:p>
+          <a:p>
+            <a:pPr>
+              <a:defRPr sz="1100" b="1"/>
+            </a:pPr>
+            <a:r>
+              <a:t>Fails: 324 | DPM: 190.9</a:t>
+            </a:r>
+          </a:p>
+        </p:txBody>
+      </p:sp>
+      <p:sp>
+        <p:nvSpPr>
+          <p:cNvPr id="8" name="Rounded Rectangle 7"/>
           <p:cNvSpPr/>
           <p:nvPr/>
         </p:nvSpPr>
         <p:spPr>
           <a:xfrm>
-            <a:off x="1554480" y="3108960"/>
-            <a:ext cx="822960" cy="274320"/>
-          </a:xfrm>
-          <a:prstGeom prst="rect">
+            <a:off x="8138160" y="1188720"/>
+            <a:ext cx="3657600" cy="1005840"/>
+          </a:xfrm>
+          <a:prstGeom prst="roundRect">
             <a:avLst/>
           </a:prstGeom>
           <a:solidFill>
-            <a:srgbClr val="0070C0"/>
+            <a:srgbClr val="E6FFE6"/>
           </a:solidFill>
-          <a:ln>
-            <a:noFill/>
+          <a:ln w="25400">
+            <a:solidFill>
+              <a:srgbClr val="009600"/>
+            </a:solidFill>
           </a:ln>
         </p:spPr>
         <p:style>
@@ -3455,55 +3397,106 @@
       </p:sp>
       <p:sp>
         <p:nvSpPr>
-          <p:cNvPr id="11" name="TextBox 10"/>
-          <p:cNvSpPr txBox="1"/>
-          <p:nvPr/>
-        </p:nvSpPr>
-        <p:spPr>
-          <a:xfrm>
-            <a:off x="2377440" y="3108960"/>
-            <a:ext cx="731520" cy="274320"/>
-          </a:xfrm>
-          <a:prstGeom prst="rect">
-            <a:avLst/>
-          </a:prstGeom>
-          <a:noFill/>
-        </p:spPr>
-        <p:txBody>
-          <a:bodyPr wrap="none">
+          <p:cNvPr id="9" name="TextBox 8"/>
+          <p:cNvSpPr txBox="1"/>
+          <p:nvPr/>
+        </p:nvSpPr>
+        <p:spPr>
+          <a:xfrm>
+            <a:off x="8229600" y="1280160"/>
+            <a:ext cx="3474720" cy="822960"/>
+          </a:xfrm>
+          <a:prstGeom prst="rect">
+            <a:avLst/>
+          </a:prstGeom>
+          <a:noFill/>
+        </p:spPr>
+        <p:txBody>
+          <a:bodyPr wrap="square">
             <a:spAutoFit/>
           </a:bodyPr>
           <a:lstStyle/>
           <a:p>
             <a:pPr>
-              <a:defRPr sz="1000" b="1">
+              <a:defRPr sz="1400" b="1">
                 <a:solidFill>
-                  <a:srgbClr val="FFFFFF"/>
+                  <a:srgbClr val="009600"/>
                 </a:solidFill>
               </a:defRPr>
             </a:pPr>
             <a:r>
-              <a:t>DPM</a:t>
-            </a:r>
-          </a:p>
-        </p:txBody>
-      </p:sp>
-      <p:sp>
-        <p:nvSpPr>
-          <p:cNvPr id="12" name="Rectangle 11"/>
+              <a:t>SLT (Combined)</a:t>
+            </a:r>
+          </a:p>
+          <a:p>
+            <a:pPr>
+              <a:defRPr sz="1000"/>
+            </a:pPr>
+            <a:r>
+              <a:t>FID UIN: 3,644,352</a:t>
+            </a:r>
+          </a:p>
+          <a:p>
+            <a:pPr>
+              <a:defRPr sz="1100" b="1"/>
+            </a:pPr>
+            <a:r>
+              <a:t>Fails: 883 | DPM: 478.0</a:t>
+            </a:r>
+          </a:p>
+        </p:txBody>
+      </p:sp>
+      <p:sp>
+        <p:nvSpPr>
+          <p:cNvPr id="10" name="TextBox 9"/>
+          <p:cNvSpPr txBox="1"/>
+          <p:nvPr/>
+        </p:nvSpPr>
+        <p:spPr>
+          <a:xfrm>
+            <a:off x="457200" y="2377440"/>
+            <a:ext cx="5486400" cy="365760"/>
+          </a:xfrm>
+          <a:prstGeom prst="rect">
+            <a:avLst/>
+          </a:prstGeom>
+          <a:noFill/>
+        </p:spPr>
+        <p:txBody>
+          <a:bodyPr wrap="none">
+            <a:spAutoFit/>
+          </a:bodyPr>
+          <a:lstStyle/>
+          <a:p>
+            <a:pPr>
+              <a:defRPr sz="1400" b="1">
+                <a:solidFill>
+                  <a:srgbClr val="003366"/>
+                </a:solidFill>
+              </a:defRPr>
+            </a:pPr>
+            <a:r>
+              <a:t>MSN_STATUS Pareto</a:t>
+            </a:r>
+          </a:p>
+        </p:txBody>
+      </p:sp>
+      <p:sp>
+        <p:nvSpPr>
+          <p:cNvPr id="11" name="Rectangle 10"/>
           <p:cNvSpPr/>
           <p:nvPr/>
         </p:nvSpPr>
         <p:spPr>
           <a:xfrm>
-            <a:off x="2377440" y="3108960"/>
-            <a:ext cx="731520" cy="274320"/>
+            <a:off x="457200" y="2697480"/>
+            <a:ext cx="1188720" cy="256032"/>
           </a:xfrm>
           <a:prstGeom prst="rect">
             <a:avLst/>
           </a:prstGeom>
           <a:solidFill>
-            <a:srgbClr val="0070C0"/>
+            <a:srgbClr val="003366"/>
           </a:solidFill>
           <a:ln>
             <a:noFill/>
@@ -3533,55 +3526,55 @@
       </p:sp>
       <p:sp>
         <p:nvSpPr>
-          <p:cNvPr id="13" name="TextBox 12"/>
-          <p:cNvSpPr txBox="1"/>
-          <p:nvPr/>
-        </p:nvSpPr>
-        <p:spPr>
-          <a:xfrm>
-            <a:off x="3108960" y="3108960"/>
-            <a:ext cx="731520" cy="274320"/>
-          </a:xfrm>
-          <a:prstGeom prst="rect">
-            <a:avLst/>
-          </a:prstGeom>
-          <a:noFill/>
-        </p:spPr>
-        <p:txBody>
-          <a:bodyPr wrap="none">
-            <a:spAutoFit/>
-          </a:bodyPr>
-          <a:lstStyle/>
-          <a:p>
-            <a:pPr>
-              <a:defRPr sz="1000" b="1">
+          <p:cNvPr id="12" name="TextBox 11"/>
+          <p:cNvSpPr txBox="1"/>
+          <p:nvPr/>
+        </p:nvSpPr>
+        <p:spPr>
+          <a:xfrm>
+            <a:off x="457200" y="2697480"/>
+            <a:ext cx="1188720" cy="256032"/>
+          </a:xfrm>
+          <a:prstGeom prst="rect">
+            <a:avLst/>
+          </a:prstGeom>
+          <a:noFill/>
+        </p:spPr>
+        <p:txBody>
+          <a:bodyPr wrap="none">
+            <a:spAutoFit/>
+          </a:bodyPr>
+          <a:lstStyle/>
+          <a:p>
+            <a:pPr algn="ctr">
+              <a:defRPr sz="900" b="1">
                 <a:solidFill>
                   <a:srgbClr val="FFFFFF"/>
                 </a:solidFill>
               </a:defRPr>
             </a:pPr>
             <a:r>
-              <a:t>% Fails</a:t>
-            </a:r>
-          </a:p>
-        </p:txBody>
-      </p:sp>
-      <p:sp>
-        <p:nvSpPr>
-          <p:cNvPr id="14" name="Rectangle 13"/>
+              <a:t>MSN_STATUS</a:t>
+            </a:r>
+          </a:p>
+        </p:txBody>
+      </p:sp>
+      <p:sp>
+        <p:nvSpPr>
+          <p:cNvPr id="13" name="Rectangle 12"/>
           <p:cNvSpPr/>
           <p:nvPr/>
         </p:nvSpPr>
         <p:spPr>
           <a:xfrm>
-            <a:off x="3108960" y="3108960"/>
-            <a:ext cx="731520" cy="274320"/>
+            <a:off x="1645920" y="2697480"/>
+            <a:ext cx="731520" cy="256032"/>
           </a:xfrm>
           <a:prstGeom prst="rect">
             <a:avLst/>
           </a:prstGeom>
           <a:solidFill>
-            <a:srgbClr val="0070C0"/>
+            <a:srgbClr val="003366"/>
           </a:solidFill>
           <a:ln>
             <a:noFill/>
@@ -3611,850 +3604,55 @@
       </p:sp>
       <p:sp>
         <p:nvSpPr>
-          <p:cNvPr id="15" name="TextBox 14"/>
-          <p:cNvSpPr txBox="1"/>
-          <p:nvPr/>
-        </p:nvSpPr>
-        <p:spPr>
-          <a:xfrm>
-            <a:off x="457200" y="3383279"/>
-            <a:ext cx="1097280" cy="274320"/>
-          </a:xfrm>
-          <a:prstGeom prst="rect">
-            <a:avLst/>
-          </a:prstGeom>
-          <a:noFill/>
-        </p:spPr>
-        <p:txBody>
-          <a:bodyPr wrap="none">
-            <a:spAutoFit/>
-          </a:bodyPr>
-          <a:lstStyle/>
-          <a:p>
-            <a:pPr>
-              <a:defRPr sz="1000" b="1">
-                <a:solidFill>
-                  <a:srgbClr val="C00000"/>
-                </a:solidFill>
-              </a:defRPr>
-            </a:pPr>
-            <a:r>
-              <a:t>Mod-Sys</a:t>
-            </a:r>
-          </a:p>
-        </p:txBody>
-      </p:sp>
-      <p:sp>
-        <p:nvSpPr>
-          <p:cNvPr id="16" name="TextBox 15"/>
-          <p:cNvSpPr txBox="1"/>
-          <p:nvPr/>
-        </p:nvSpPr>
-        <p:spPr>
-          <a:xfrm>
-            <a:off x="1554480" y="3383279"/>
-            <a:ext cx="822960" cy="274320"/>
-          </a:xfrm>
-          <a:prstGeom prst="rect">
-            <a:avLst/>
-          </a:prstGeom>
-          <a:noFill/>
-        </p:spPr>
-        <p:txBody>
-          <a:bodyPr wrap="none">
-            <a:spAutoFit/>
-          </a:bodyPr>
-          <a:lstStyle/>
-          <a:p>
-            <a:pPr>
-              <a:defRPr sz="1000" b="1">
-                <a:solidFill>
-                  <a:srgbClr val="C00000"/>
-                </a:solidFill>
-              </a:defRPr>
-            </a:pPr>
-            <a:r>
-              <a:t>426</a:t>
-            </a:r>
-          </a:p>
-        </p:txBody>
-      </p:sp>
-      <p:sp>
-        <p:nvSpPr>
-          <p:cNvPr id="17" name="TextBox 16"/>
-          <p:cNvSpPr txBox="1"/>
-          <p:nvPr/>
-        </p:nvSpPr>
-        <p:spPr>
-          <a:xfrm>
-            <a:off x="2377440" y="3383279"/>
-            <a:ext cx="731520" cy="274320"/>
-          </a:xfrm>
-          <a:prstGeom prst="rect">
-            <a:avLst/>
-          </a:prstGeom>
-          <a:noFill/>
-        </p:spPr>
-        <p:txBody>
-          <a:bodyPr wrap="none">
-            <a:spAutoFit/>
-          </a:bodyPr>
-          <a:lstStyle/>
-          <a:p>
-            <a:pPr>
-              <a:defRPr sz="1000" b="1">
-                <a:solidFill>
-                  <a:srgbClr val="C00000"/>
-                </a:solidFill>
-              </a:defRPr>
-            </a:pPr>
-            <a:r>
-              <a:t>218.8</a:t>
-            </a:r>
-          </a:p>
-        </p:txBody>
-      </p:sp>
-      <p:sp>
-        <p:nvSpPr>
-          <p:cNvPr id="18" name="TextBox 17"/>
-          <p:cNvSpPr txBox="1"/>
-          <p:nvPr/>
-        </p:nvSpPr>
-        <p:spPr>
-          <a:xfrm>
-            <a:off x="3108960" y="3383279"/>
-            <a:ext cx="731520" cy="274320"/>
-          </a:xfrm>
-          <a:prstGeom prst="rect">
-            <a:avLst/>
-          </a:prstGeom>
-          <a:noFill/>
-        </p:spPr>
-        <p:txBody>
-          <a:bodyPr wrap="none">
-            <a:spAutoFit/>
-          </a:bodyPr>
-          <a:lstStyle/>
-          <a:p>
-            <a:pPr>
-              <a:defRPr sz="1000" b="1">
-                <a:solidFill>
-                  <a:srgbClr val="C00000"/>
-                </a:solidFill>
-              </a:defRPr>
-            </a:pPr>
-            <a:r>
-              <a:t>76%</a:t>
-            </a:r>
-          </a:p>
-        </p:txBody>
-      </p:sp>
-      <p:sp>
-        <p:nvSpPr>
-          <p:cNvPr id="19" name="TextBox 18"/>
-          <p:cNvSpPr txBox="1"/>
-          <p:nvPr/>
-        </p:nvSpPr>
-        <p:spPr>
-          <a:xfrm>
-            <a:off x="457200" y="3657600"/>
-            <a:ext cx="1097280" cy="274320"/>
-          </a:xfrm>
-          <a:prstGeom prst="rect">
-            <a:avLst/>
-          </a:prstGeom>
-          <a:noFill/>
-        </p:spPr>
-        <p:txBody>
-          <a:bodyPr wrap="none">
-            <a:spAutoFit/>
-          </a:bodyPr>
-          <a:lstStyle/>
-          <a:p>
-            <a:pPr>
-              <a:defRPr sz="1000"/>
-            </a:pPr>
-            <a:r>
-              <a:t>Row</a:t>
-            </a:r>
-          </a:p>
-        </p:txBody>
-      </p:sp>
-      <p:sp>
-        <p:nvSpPr>
-          <p:cNvPr id="20" name="TextBox 19"/>
-          <p:cNvSpPr txBox="1"/>
-          <p:nvPr/>
-        </p:nvSpPr>
-        <p:spPr>
-          <a:xfrm>
-            <a:off x="1554480" y="3657600"/>
-            <a:ext cx="822960" cy="274320"/>
-          </a:xfrm>
-          <a:prstGeom prst="rect">
-            <a:avLst/>
-          </a:prstGeom>
-          <a:noFill/>
-        </p:spPr>
-        <p:txBody>
-          <a:bodyPr wrap="none">
-            <a:spAutoFit/>
-          </a:bodyPr>
-          <a:lstStyle/>
-          <a:p>
-            <a:pPr>
-              <a:defRPr sz="1000"/>
-            </a:pPr>
-            <a:r>
-              <a:t>45</a:t>
-            </a:r>
-          </a:p>
-        </p:txBody>
-      </p:sp>
-      <p:sp>
-        <p:nvSpPr>
-          <p:cNvPr id="21" name="TextBox 20"/>
-          <p:cNvSpPr txBox="1"/>
-          <p:nvPr/>
-        </p:nvSpPr>
-        <p:spPr>
-          <a:xfrm>
-            <a:off x="2377440" y="3657600"/>
-            <a:ext cx="731520" cy="274320"/>
-          </a:xfrm>
-          <a:prstGeom prst="rect">
-            <a:avLst/>
-          </a:prstGeom>
-          <a:noFill/>
-        </p:spPr>
-        <p:txBody>
-          <a:bodyPr wrap="none">
-            <a:spAutoFit/>
-          </a:bodyPr>
-          <a:lstStyle/>
-          <a:p>
-            <a:pPr>
-              <a:defRPr sz="1000"/>
-            </a:pPr>
-            <a:r>
-              <a:t>23.1</a:t>
-            </a:r>
-          </a:p>
-        </p:txBody>
-      </p:sp>
-      <p:sp>
-        <p:nvSpPr>
-          <p:cNvPr id="22" name="TextBox 21"/>
-          <p:cNvSpPr txBox="1"/>
-          <p:nvPr/>
-        </p:nvSpPr>
-        <p:spPr>
-          <a:xfrm>
-            <a:off x="3108960" y="3657600"/>
-            <a:ext cx="731520" cy="274320"/>
-          </a:xfrm>
-          <a:prstGeom prst="rect">
-            <a:avLst/>
-          </a:prstGeom>
-          <a:noFill/>
-        </p:spPr>
-        <p:txBody>
-          <a:bodyPr wrap="none">
-            <a:spAutoFit/>
-          </a:bodyPr>
-          <a:lstStyle/>
-          <a:p>
-            <a:pPr>
-              <a:defRPr sz="1000"/>
-            </a:pPr>
-            <a:r>
-              <a:t>8%</a:t>
-            </a:r>
-          </a:p>
-        </p:txBody>
-      </p:sp>
-      <p:sp>
-        <p:nvSpPr>
-          <p:cNvPr id="23" name="TextBox 22"/>
-          <p:cNvSpPr txBox="1"/>
-          <p:nvPr/>
-        </p:nvSpPr>
-        <p:spPr>
-          <a:xfrm>
-            <a:off x="457200" y="3931920"/>
-            <a:ext cx="1097280" cy="274320"/>
-          </a:xfrm>
-          <a:prstGeom prst="rect">
-            <a:avLst/>
-          </a:prstGeom>
-          <a:noFill/>
-        </p:spPr>
-        <p:txBody>
-          <a:bodyPr wrap="none">
-            <a:spAutoFit/>
-          </a:bodyPr>
-          <a:lstStyle/>
-          <a:p>
-            <a:pPr>
-              <a:defRPr sz="1000"/>
-            </a:pPr>
-            <a:r>
-              <a:t>Hang</a:t>
-            </a:r>
-          </a:p>
-        </p:txBody>
-      </p:sp>
-      <p:sp>
-        <p:nvSpPr>
-          <p:cNvPr id="24" name="TextBox 23"/>
-          <p:cNvSpPr txBox="1"/>
-          <p:nvPr/>
-        </p:nvSpPr>
-        <p:spPr>
-          <a:xfrm>
-            <a:off x="1554480" y="3931920"/>
-            <a:ext cx="822960" cy="274320"/>
-          </a:xfrm>
-          <a:prstGeom prst="rect">
-            <a:avLst/>
-          </a:prstGeom>
-          <a:noFill/>
-        </p:spPr>
-        <p:txBody>
-          <a:bodyPr wrap="none">
-            <a:spAutoFit/>
-          </a:bodyPr>
-          <a:lstStyle/>
-          <a:p>
-            <a:pPr>
-              <a:defRPr sz="1000"/>
-            </a:pPr>
-            <a:r>
-              <a:t>34</a:t>
-            </a:r>
-          </a:p>
-        </p:txBody>
-      </p:sp>
-      <p:sp>
-        <p:nvSpPr>
-          <p:cNvPr id="25" name="TextBox 24"/>
-          <p:cNvSpPr txBox="1"/>
-          <p:nvPr/>
-        </p:nvSpPr>
-        <p:spPr>
-          <a:xfrm>
-            <a:off x="2377440" y="3931920"/>
-            <a:ext cx="731520" cy="274320"/>
-          </a:xfrm>
-          <a:prstGeom prst="rect">
-            <a:avLst/>
-          </a:prstGeom>
-          <a:noFill/>
-        </p:spPr>
-        <p:txBody>
-          <a:bodyPr wrap="none">
-            <a:spAutoFit/>
-          </a:bodyPr>
-          <a:lstStyle/>
-          <a:p>
-            <a:pPr>
-              <a:defRPr sz="1000"/>
-            </a:pPr>
-            <a:r>
-              <a:t>17.5</a:t>
-            </a:r>
-          </a:p>
-        </p:txBody>
-      </p:sp>
-      <p:sp>
-        <p:nvSpPr>
-          <p:cNvPr id="26" name="TextBox 25"/>
-          <p:cNvSpPr txBox="1"/>
-          <p:nvPr/>
-        </p:nvSpPr>
-        <p:spPr>
-          <a:xfrm>
-            <a:off x="3108960" y="3931920"/>
-            <a:ext cx="731520" cy="274320"/>
-          </a:xfrm>
-          <a:prstGeom prst="rect">
-            <a:avLst/>
-          </a:prstGeom>
-          <a:noFill/>
-        </p:spPr>
-        <p:txBody>
-          <a:bodyPr wrap="none">
-            <a:spAutoFit/>
-          </a:bodyPr>
-          <a:lstStyle/>
-          <a:p>
-            <a:pPr>
-              <a:defRPr sz="1000"/>
-            </a:pPr>
-            <a:r>
-              <a:t>6%</a:t>
-            </a:r>
-          </a:p>
-        </p:txBody>
-      </p:sp>
-      <p:sp>
-        <p:nvSpPr>
-          <p:cNvPr id="27" name="TextBox 26"/>
-          <p:cNvSpPr txBox="1"/>
-          <p:nvPr/>
-        </p:nvSpPr>
-        <p:spPr>
-          <a:xfrm>
-            <a:off x="457200" y="4206240"/>
-            <a:ext cx="1097280" cy="274320"/>
-          </a:xfrm>
-          <a:prstGeom prst="rect">
-            <a:avLst/>
-          </a:prstGeom>
-          <a:noFill/>
-        </p:spPr>
-        <p:txBody>
-          <a:bodyPr wrap="none">
-            <a:spAutoFit/>
-          </a:bodyPr>
-          <a:lstStyle/>
-          <a:p>
-            <a:pPr>
-              <a:defRPr sz="1000"/>
-            </a:pPr>
-            <a:r>
-              <a:t>DQ</a:t>
-            </a:r>
-          </a:p>
-        </p:txBody>
-      </p:sp>
-      <p:sp>
-        <p:nvSpPr>
-          <p:cNvPr id="28" name="TextBox 27"/>
-          <p:cNvSpPr txBox="1"/>
-          <p:nvPr/>
-        </p:nvSpPr>
-        <p:spPr>
-          <a:xfrm>
-            <a:off x="1554480" y="4206240"/>
-            <a:ext cx="822960" cy="274320"/>
-          </a:xfrm>
-          <a:prstGeom prst="rect">
-            <a:avLst/>
-          </a:prstGeom>
-          <a:noFill/>
-        </p:spPr>
-        <p:txBody>
-          <a:bodyPr wrap="none">
-            <a:spAutoFit/>
-          </a:bodyPr>
-          <a:lstStyle/>
-          <a:p>
-            <a:pPr>
-              <a:defRPr sz="1000"/>
-            </a:pPr>
-            <a:r>
-              <a:t>26</a:t>
-            </a:r>
-          </a:p>
-        </p:txBody>
-      </p:sp>
-      <p:sp>
-        <p:nvSpPr>
-          <p:cNvPr id="29" name="TextBox 28"/>
-          <p:cNvSpPr txBox="1"/>
-          <p:nvPr/>
-        </p:nvSpPr>
-        <p:spPr>
-          <a:xfrm>
-            <a:off x="2377440" y="4206240"/>
-            <a:ext cx="731520" cy="274320"/>
-          </a:xfrm>
-          <a:prstGeom prst="rect">
-            <a:avLst/>
-          </a:prstGeom>
-          <a:noFill/>
-        </p:spPr>
-        <p:txBody>
-          <a:bodyPr wrap="none">
-            <a:spAutoFit/>
-          </a:bodyPr>
-          <a:lstStyle/>
-          <a:p>
-            <a:pPr>
-              <a:defRPr sz="1000"/>
-            </a:pPr>
-            <a:r>
-              <a:t>13.4</a:t>
-            </a:r>
-          </a:p>
-        </p:txBody>
-      </p:sp>
-      <p:sp>
-        <p:nvSpPr>
-          <p:cNvPr id="30" name="TextBox 29"/>
-          <p:cNvSpPr txBox="1"/>
-          <p:nvPr/>
-        </p:nvSpPr>
-        <p:spPr>
-          <a:xfrm>
-            <a:off x="3108960" y="4206240"/>
-            <a:ext cx="731520" cy="274320"/>
-          </a:xfrm>
-          <a:prstGeom prst="rect">
-            <a:avLst/>
-          </a:prstGeom>
-          <a:noFill/>
-        </p:spPr>
-        <p:txBody>
-          <a:bodyPr wrap="none">
-            <a:spAutoFit/>
-          </a:bodyPr>
-          <a:lstStyle/>
-          <a:p>
-            <a:pPr>
-              <a:defRPr sz="1000"/>
-            </a:pPr>
-            <a:r>
-              <a:t>5%</a:t>
-            </a:r>
-          </a:p>
-        </p:txBody>
-      </p:sp>
-      <p:sp>
-        <p:nvSpPr>
-          <p:cNvPr id="31" name="TextBox 30"/>
-          <p:cNvSpPr txBox="1"/>
-          <p:nvPr/>
-        </p:nvSpPr>
-        <p:spPr>
-          <a:xfrm>
-            <a:off x="457200" y="4480560"/>
-            <a:ext cx="1097280" cy="274320"/>
-          </a:xfrm>
-          <a:prstGeom prst="rect">
-            <a:avLst/>
-          </a:prstGeom>
-          <a:noFill/>
-        </p:spPr>
-        <p:txBody>
-          <a:bodyPr wrap="none">
-            <a:spAutoFit/>
-          </a:bodyPr>
-          <a:lstStyle/>
-          <a:p>
-            <a:pPr>
-              <a:defRPr sz="1000"/>
-            </a:pPr>
-            <a:r>
-              <a:t>Multi-DQ</a:t>
-            </a:r>
-          </a:p>
-        </p:txBody>
-      </p:sp>
-      <p:sp>
-        <p:nvSpPr>
-          <p:cNvPr id="32" name="TextBox 31"/>
-          <p:cNvSpPr txBox="1"/>
-          <p:nvPr/>
-        </p:nvSpPr>
-        <p:spPr>
-          <a:xfrm>
-            <a:off x="1554480" y="4480560"/>
-            <a:ext cx="822960" cy="274320"/>
-          </a:xfrm>
-          <a:prstGeom prst="rect">
-            <a:avLst/>
-          </a:prstGeom>
-          <a:noFill/>
-        </p:spPr>
-        <p:txBody>
-          <a:bodyPr wrap="none">
-            <a:spAutoFit/>
-          </a:bodyPr>
-          <a:lstStyle/>
-          <a:p>
-            <a:pPr>
-              <a:defRPr sz="1000"/>
-            </a:pPr>
-            <a:r>
-              <a:t>14</a:t>
-            </a:r>
-          </a:p>
-        </p:txBody>
-      </p:sp>
-      <p:sp>
-        <p:nvSpPr>
-          <p:cNvPr id="33" name="TextBox 32"/>
-          <p:cNvSpPr txBox="1"/>
-          <p:nvPr/>
-        </p:nvSpPr>
-        <p:spPr>
-          <a:xfrm>
-            <a:off x="2377440" y="4480560"/>
-            <a:ext cx="731520" cy="274320"/>
-          </a:xfrm>
-          <a:prstGeom prst="rect">
-            <a:avLst/>
-          </a:prstGeom>
-          <a:noFill/>
-        </p:spPr>
-        <p:txBody>
-          <a:bodyPr wrap="none">
-            <a:spAutoFit/>
-          </a:bodyPr>
-          <a:lstStyle/>
-          <a:p>
-            <a:pPr>
-              <a:defRPr sz="1000"/>
-            </a:pPr>
-            <a:r>
-              <a:t>7.2</a:t>
-            </a:r>
-          </a:p>
-        </p:txBody>
-      </p:sp>
-      <p:sp>
-        <p:nvSpPr>
-          <p:cNvPr id="34" name="TextBox 33"/>
-          <p:cNvSpPr txBox="1"/>
-          <p:nvPr/>
-        </p:nvSpPr>
-        <p:spPr>
-          <a:xfrm>
-            <a:off x="3108960" y="4480560"/>
-            <a:ext cx="731520" cy="274320"/>
-          </a:xfrm>
-          <a:prstGeom prst="rect">
-            <a:avLst/>
-          </a:prstGeom>
-          <a:noFill/>
-        </p:spPr>
-        <p:txBody>
-          <a:bodyPr wrap="none">
-            <a:spAutoFit/>
-          </a:bodyPr>
-          <a:lstStyle/>
-          <a:p>
-            <a:pPr>
-              <a:defRPr sz="1000"/>
-            </a:pPr>
-            <a:r>
-              <a:t>3%</a:t>
-            </a:r>
-          </a:p>
-        </p:txBody>
-      </p:sp>
-      <p:sp>
-        <p:nvSpPr>
-          <p:cNvPr id="35" name="TextBox 34"/>
-          <p:cNvSpPr txBox="1"/>
-          <p:nvPr/>
-        </p:nvSpPr>
-        <p:spPr>
-          <a:xfrm>
-            <a:off x="457200" y="4754879"/>
-            <a:ext cx="1097280" cy="274320"/>
-          </a:xfrm>
-          <a:prstGeom prst="rect">
-            <a:avLst/>
-          </a:prstGeom>
-          <a:noFill/>
-        </p:spPr>
-        <p:txBody>
-          <a:bodyPr wrap="none">
-            <a:spAutoFit/>
-          </a:bodyPr>
-          <a:lstStyle/>
-          <a:p>
-            <a:pPr>
-              <a:defRPr sz="1000"/>
-            </a:pPr>
-            <a:r>
-              <a:t>Other</a:t>
-            </a:r>
-          </a:p>
-        </p:txBody>
-      </p:sp>
-      <p:sp>
-        <p:nvSpPr>
-          <p:cNvPr id="36" name="TextBox 35"/>
-          <p:cNvSpPr txBox="1"/>
-          <p:nvPr/>
-        </p:nvSpPr>
-        <p:spPr>
-          <a:xfrm>
-            <a:off x="1554480" y="4754879"/>
-            <a:ext cx="822960" cy="274320"/>
-          </a:xfrm>
-          <a:prstGeom prst="rect">
-            <a:avLst/>
-          </a:prstGeom>
-          <a:noFill/>
-        </p:spPr>
-        <p:txBody>
-          <a:bodyPr wrap="none">
-            <a:spAutoFit/>
-          </a:bodyPr>
-          <a:lstStyle/>
-          <a:p>
-            <a:pPr>
-              <a:defRPr sz="1000"/>
-            </a:pPr>
-            <a:r>
-              <a:t>14</a:t>
-            </a:r>
-          </a:p>
-        </p:txBody>
-      </p:sp>
-      <p:sp>
-        <p:nvSpPr>
-          <p:cNvPr id="37" name="TextBox 36"/>
-          <p:cNvSpPr txBox="1"/>
-          <p:nvPr/>
-        </p:nvSpPr>
-        <p:spPr>
-          <a:xfrm>
-            <a:off x="2377440" y="4754879"/>
-            <a:ext cx="731520" cy="274320"/>
-          </a:xfrm>
-          <a:prstGeom prst="rect">
-            <a:avLst/>
-          </a:prstGeom>
-          <a:noFill/>
-        </p:spPr>
-        <p:txBody>
-          <a:bodyPr wrap="none">
-            <a:spAutoFit/>
-          </a:bodyPr>
-          <a:lstStyle/>
-          <a:p>
-            <a:pPr>
-              <a:defRPr sz="1000"/>
-            </a:pPr>
-            <a:r>
-              <a:t>7.2</a:t>
-            </a:r>
-          </a:p>
-        </p:txBody>
-      </p:sp>
-      <p:sp>
-        <p:nvSpPr>
-          <p:cNvPr id="38" name="TextBox 37"/>
-          <p:cNvSpPr txBox="1"/>
-          <p:nvPr/>
-        </p:nvSpPr>
-        <p:spPr>
-          <a:xfrm>
-            <a:off x="3108960" y="4754879"/>
-            <a:ext cx="731520" cy="274320"/>
-          </a:xfrm>
-          <a:prstGeom prst="rect">
-            <a:avLst/>
-          </a:prstGeom>
-          <a:noFill/>
-        </p:spPr>
-        <p:txBody>
-          <a:bodyPr wrap="none">
-            <a:spAutoFit/>
-          </a:bodyPr>
-          <a:lstStyle/>
-          <a:p>
-            <a:pPr>
-              <a:defRPr sz="1000"/>
-            </a:pPr>
-            <a:r>
-              <a:t>2%</a:t>
-            </a:r>
-          </a:p>
-        </p:txBody>
-      </p:sp>
-      <p:sp>
-        <p:nvSpPr>
-          <p:cNvPr id="39" name="TextBox 38"/>
-          <p:cNvSpPr txBox="1"/>
-          <p:nvPr/>
-        </p:nvSpPr>
-        <p:spPr>
-          <a:xfrm>
-            <a:off x="4572000" y="2743200"/>
-            <a:ext cx="3657600" cy="365760"/>
-          </a:xfrm>
-          <a:prstGeom prst="rect">
-            <a:avLst/>
-          </a:prstGeom>
-          <a:noFill/>
-        </p:spPr>
-        <p:txBody>
-          <a:bodyPr wrap="none">
-            <a:spAutoFit/>
-          </a:bodyPr>
-          <a:lstStyle/>
-          <a:p>
-            <a:pPr>
-              <a:defRPr sz="1600" b="1">
-                <a:solidFill>
-                  <a:srgbClr val="003366"/>
-                </a:solidFill>
-              </a:defRPr>
-            </a:pPr>
-            <a:r>
-              <a:t>FAILCRAWLER Pareto (Top 5)</a:t>
-            </a:r>
-          </a:p>
-        </p:txBody>
-      </p:sp>
-      <p:sp>
-        <p:nvSpPr>
-          <p:cNvPr id="40" name="TextBox 39"/>
-          <p:cNvSpPr txBox="1"/>
-          <p:nvPr/>
-        </p:nvSpPr>
-        <p:spPr>
-          <a:xfrm>
-            <a:off x="4572000" y="3108960"/>
-            <a:ext cx="2286000" cy="274320"/>
-          </a:xfrm>
-          <a:prstGeom prst="rect">
-            <a:avLst/>
-          </a:prstGeom>
-          <a:noFill/>
-        </p:spPr>
-        <p:txBody>
-          <a:bodyPr wrap="none">
-            <a:spAutoFit/>
-          </a:bodyPr>
-          <a:lstStyle/>
-          <a:p>
-            <a:pPr>
-              <a:defRPr sz="1000" b="1">
+          <p:cNvPr id="14" name="TextBox 13"/>
+          <p:cNvSpPr txBox="1"/>
+          <p:nvPr/>
+        </p:nvSpPr>
+        <p:spPr>
+          <a:xfrm>
+            <a:off x="1645920" y="2697480"/>
+            <a:ext cx="731520" cy="256032"/>
+          </a:xfrm>
+          <a:prstGeom prst="rect">
+            <a:avLst/>
+          </a:prstGeom>
+          <a:noFill/>
+        </p:spPr>
+        <p:txBody>
+          <a:bodyPr wrap="none">
+            <a:spAutoFit/>
+          </a:bodyPr>
+          <a:lstStyle/>
+          <a:p>
+            <a:pPr algn="ctr">
+              <a:defRPr sz="900" b="1">
                 <a:solidFill>
                   <a:srgbClr val="FFFFFF"/>
                 </a:solidFill>
               </a:defRPr>
             </a:pPr>
             <a:r>
-              <a:t>FAILCRAWLER</a:t>
-            </a:r>
-          </a:p>
-        </p:txBody>
-      </p:sp>
-      <p:sp>
-        <p:nvSpPr>
-          <p:cNvPr id="41" name="Rectangle 40"/>
+              <a:t>HMB1</a:t>
+            </a:r>
+          </a:p>
+        </p:txBody>
+      </p:sp>
+      <p:sp>
+        <p:nvSpPr>
+          <p:cNvPr id="15" name="Rectangle 14"/>
           <p:cNvSpPr/>
           <p:nvPr/>
         </p:nvSpPr>
         <p:spPr>
           <a:xfrm>
-            <a:off x="4572000" y="3108960"/>
-            <a:ext cx="2286000" cy="274320"/>
+            <a:off x="2377440" y="2697480"/>
+            <a:ext cx="731520" cy="256032"/>
           </a:xfrm>
           <a:prstGeom prst="rect">
             <a:avLst/>
           </a:prstGeom>
           <a:solidFill>
-            <a:srgbClr val="0070C0"/>
+            <a:srgbClr val="003366"/>
           </a:solidFill>
           <a:ln>
             <a:noFill/>
@@ -4484,55 +3682,55 @@
       </p:sp>
       <p:sp>
         <p:nvSpPr>
-          <p:cNvPr id="42" name="TextBox 41"/>
-          <p:cNvSpPr txBox="1"/>
-          <p:nvPr/>
-        </p:nvSpPr>
-        <p:spPr>
-          <a:xfrm>
-            <a:off x="6858000" y="3108960"/>
-            <a:ext cx="731520" cy="274320"/>
-          </a:xfrm>
-          <a:prstGeom prst="rect">
-            <a:avLst/>
-          </a:prstGeom>
-          <a:noFill/>
-        </p:spPr>
-        <p:txBody>
-          <a:bodyPr wrap="none">
-            <a:spAutoFit/>
-          </a:bodyPr>
-          <a:lstStyle/>
-          <a:p>
-            <a:pPr>
-              <a:defRPr sz="1000" b="1">
+          <p:cNvPr id="16" name="TextBox 15"/>
+          <p:cNvSpPr txBox="1"/>
+          <p:nvPr/>
+        </p:nvSpPr>
+        <p:spPr>
+          <a:xfrm>
+            <a:off x="2377440" y="2697480"/>
+            <a:ext cx="731520" cy="256032"/>
+          </a:xfrm>
+          <a:prstGeom prst="rect">
+            <a:avLst/>
+          </a:prstGeom>
+          <a:noFill/>
+        </p:spPr>
+        <p:txBody>
+          <a:bodyPr wrap="none">
+            <a:spAutoFit/>
+          </a:bodyPr>
+          <a:lstStyle/>
+          <a:p>
+            <a:pPr algn="ctr">
+              <a:defRPr sz="900" b="1">
                 <a:solidFill>
                   <a:srgbClr val="FFFFFF"/>
                 </a:solidFill>
               </a:defRPr>
             </a:pPr>
             <a:r>
-              <a:t>cDPM</a:t>
-            </a:r>
-          </a:p>
-        </p:txBody>
-      </p:sp>
-      <p:sp>
-        <p:nvSpPr>
-          <p:cNvPr id="43" name="Rectangle 42"/>
+              <a:t>QMON</a:t>
+            </a:r>
+          </a:p>
+        </p:txBody>
+      </p:sp>
+      <p:sp>
+        <p:nvSpPr>
+          <p:cNvPr id="17" name="Rectangle 16"/>
           <p:cNvSpPr/>
           <p:nvPr/>
         </p:nvSpPr>
         <p:spPr>
           <a:xfrm>
-            <a:off x="6858000" y="3108960"/>
-            <a:ext cx="731520" cy="274320"/>
+            <a:off x="3108960" y="2697480"/>
+            <a:ext cx="731520" cy="256032"/>
           </a:xfrm>
           <a:prstGeom prst="rect">
             <a:avLst/>
           </a:prstGeom>
           <a:solidFill>
-            <a:srgbClr val="0070C0"/>
+            <a:srgbClr val="003366"/>
           </a:solidFill>
           <a:ln>
             <a:noFill/>
@@ -4562,55 +3760,55 @@
       </p:sp>
       <p:sp>
         <p:nvSpPr>
-          <p:cNvPr id="44" name="TextBox 43"/>
-          <p:cNvSpPr txBox="1"/>
-          <p:nvPr/>
-        </p:nvSpPr>
-        <p:spPr>
-          <a:xfrm>
-            <a:off x="7589520" y="3108960"/>
-            <a:ext cx="731520" cy="274320"/>
-          </a:xfrm>
-          <a:prstGeom prst="rect">
-            <a:avLst/>
-          </a:prstGeom>
-          <a:noFill/>
-        </p:spPr>
-        <p:txBody>
-          <a:bodyPr wrap="none">
-            <a:spAutoFit/>
-          </a:bodyPr>
-          <a:lstStyle/>
-          <a:p>
-            <a:pPr>
-              <a:defRPr sz="1000" b="1">
+          <p:cNvPr id="18" name="TextBox 17"/>
+          <p:cNvSpPr txBox="1"/>
+          <p:nvPr/>
+        </p:nvSpPr>
+        <p:spPr>
+          <a:xfrm>
+            <a:off x="3108960" y="2697480"/>
+            <a:ext cx="731520" cy="256032"/>
+          </a:xfrm>
+          <a:prstGeom prst="rect">
+            <a:avLst/>
+          </a:prstGeom>
+          <a:noFill/>
+        </p:spPr>
+        <p:txBody>
+          <a:bodyPr wrap="none">
+            <a:spAutoFit/>
+          </a:bodyPr>
+          <a:lstStyle/>
+          <a:p>
+            <a:pPr algn="ctr">
+              <a:defRPr sz="900" b="1">
                 <a:solidFill>
                   <a:srgbClr val="FFFFFF"/>
                 </a:solidFill>
               </a:defRPr>
             </a:pPr>
             <a:r>
-              <a:t>% Share</a:t>
-            </a:r>
-          </a:p>
-        </p:txBody>
-      </p:sp>
-      <p:sp>
-        <p:nvSpPr>
-          <p:cNvPr id="45" name="Rectangle 44"/>
+              <a:t>SLT</a:t>
+            </a:r>
+          </a:p>
+        </p:txBody>
+      </p:sp>
+      <p:sp>
+        <p:nvSpPr>
+          <p:cNvPr id="19" name="Rectangle 18"/>
           <p:cNvSpPr/>
           <p:nvPr/>
         </p:nvSpPr>
         <p:spPr>
           <a:xfrm>
-            <a:off x="7589520" y="3108960"/>
-            <a:ext cx="731520" cy="274320"/>
+            <a:off x="3840480" y="2697480"/>
+            <a:ext cx="731520" cy="256032"/>
           </a:xfrm>
           <a:prstGeom prst="rect">
             <a:avLst/>
           </a:prstGeom>
           <a:solidFill>
-            <a:srgbClr val="0070C0"/>
+            <a:srgbClr val="003366"/>
           </a:solidFill>
           <a:ln>
             <a:noFill/>
@@ -4640,14 +3838,49 @@
       </p:sp>
       <p:sp>
         <p:nvSpPr>
-          <p:cNvPr id="46" name="TextBox 45"/>
-          <p:cNvSpPr txBox="1"/>
-          <p:nvPr/>
-        </p:nvSpPr>
-        <p:spPr>
-          <a:xfrm>
-            <a:off x="4572000" y="3383279"/>
-            <a:ext cx="2286000" cy="274320"/>
+          <p:cNvPr id="20" name="TextBox 19"/>
+          <p:cNvSpPr txBox="1"/>
+          <p:nvPr/>
+        </p:nvSpPr>
+        <p:spPr>
+          <a:xfrm>
+            <a:off x="3840480" y="2697480"/>
+            <a:ext cx="731520" cy="256032"/>
+          </a:xfrm>
+          <a:prstGeom prst="rect">
+            <a:avLst/>
+          </a:prstGeom>
+          <a:noFill/>
+        </p:spPr>
+        <p:txBody>
+          <a:bodyPr wrap="none">
+            <a:spAutoFit/>
+          </a:bodyPr>
+          <a:lstStyle/>
+          <a:p>
+            <a:pPr algn="ctr">
+              <a:defRPr sz="900" b="1">
+                <a:solidFill>
+                  <a:srgbClr val="FFFFFF"/>
+                </a:solidFill>
+              </a:defRPr>
+            </a:pPr>
+            <a:r>
+              <a:t>% SLT</a:t>
+            </a:r>
+          </a:p>
+        </p:txBody>
+      </p:sp>
+      <p:sp>
+        <p:nvSpPr>
+          <p:cNvPr id="21" name="TextBox 20"/>
+          <p:cNvSpPr txBox="1"/>
+          <p:nvPr/>
+        </p:nvSpPr>
+        <p:spPr>
+          <a:xfrm>
+            <a:off x="457200" y="2953512"/>
+            <a:ext cx="1188720" cy="256032"/>
           </a:xfrm>
           <a:prstGeom prst="rect">
             <a:avLst/>
@@ -4661,84 +3894,867 @@
           <a:lstStyle/>
           <a:p>
             <a:pPr>
-              <a:defRPr sz="1000" b="1">
+              <a:defRPr sz="900" b="1">
                 <a:solidFill>
                   <a:srgbClr val="C00000"/>
                 </a:solidFill>
               </a:defRPr>
             </a:pPr>
             <a:r>
-              <a:t>MULTI_BANK_MULTI_DQ</a:t>
-            </a:r>
-          </a:p>
-        </p:txBody>
-      </p:sp>
-      <p:sp>
-        <p:nvSpPr>
-          <p:cNvPr id="47" name="TextBox 46"/>
-          <p:cNvSpPr txBox="1"/>
-          <p:nvPr/>
-        </p:nvSpPr>
-        <p:spPr>
-          <a:xfrm>
-            <a:off x="6858000" y="3383279"/>
-            <a:ext cx="731520" cy="274320"/>
-          </a:xfrm>
-          <a:prstGeom prst="rect">
-            <a:avLst/>
-          </a:prstGeom>
-          <a:noFill/>
-        </p:spPr>
-        <p:txBody>
-          <a:bodyPr wrap="none">
-            <a:spAutoFit/>
-          </a:bodyPr>
-          <a:lstStyle/>
-          <a:p>
-            <a:pPr>
-              <a:defRPr sz="1000" b="1">
+              <a:t>Mod-Sys</a:t>
+            </a:r>
+          </a:p>
+        </p:txBody>
+      </p:sp>
+      <p:sp>
+        <p:nvSpPr>
+          <p:cNvPr id="22" name="TextBox 21"/>
+          <p:cNvSpPr txBox="1"/>
+          <p:nvPr/>
+        </p:nvSpPr>
+        <p:spPr>
+          <a:xfrm>
+            <a:off x="1645920" y="2953512"/>
+            <a:ext cx="731520" cy="256032"/>
+          </a:xfrm>
+          <a:prstGeom prst="rect">
+            <a:avLst/>
+          </a:prstGeom>
+          <a:noFill/>
+        </p:spPr>
+        <p:txBody>
+          <a:bodyPr wrap="none">
+            <a:spAutoFit/>
+          </a:bodyPr>
+          <a:lstStyle/>
+          <a:p>
+            <a:pPr algn="ctr">
+              <a:defRPr sz="900" b="1">
                 <a:solidFill>
                   <a:srgbClr val="C00000"/>
                 </a:solidFill>
               </a:defRPr>
             </a:pPr>
             <a:r>
-              <a:t>117.1</a:t>
-            </a:r>
-          </a:p>
-        </p:txBody>
-      </p:sp>
-      <p:sp>
-        <p:nvSpPr>
-          <p:cNvPr id="48" name="TextBox 47"/>
-          <p:cNvSpPr txBox="1"/>
-          <p:nvPr/>
-        </p:nvSpPr>
-        <p:spPr>
-          <a:xfrm>
-            <a:off x="7589520" y="3383279"/>
-            <a:ext cx="731520" cy="274320"/>
-          </a:xfrm>
-          <a:prstGeom prst="rect">
-            <a:avLst/>
-          </a:prstGeom>
-          <a:noFill/>
-        </p:spPr>
-        <p:txBody>
-          <a:bodyPr wrap="none">
-            <a:spAutoFit/>
-          </a:bodyPr>
-          <a:lstStyle/>
-          <a:p>
-            <a:pPr>
-              <a:defRPr sz="1000" b="1">
+              <a:t>426</a:t>
+            </a:r>
+          </a:p>
+        </p:txBody>
+      </p:sp>
+      <p:sp>
+        <p:nvSpPr>
+          <p:cNvPr id="23" name="TextBox 22"/>
+          <p:cNvSpPr txBox="1"/>
+          <p:nvPr/>
+        </p:nvSpPr>
+        <p:spPr>
+          <a:xfrm>
+            <a:off x="2377440" y="2953512"/>
+            <a:ext cx="731520" cy="256032"/>
+          </a:xfrm>
+          <a:prstGeom prst="rect">
+            <a:avLst/>
+          </a:prstGeom>
+          <a:noFill/>
+        </p:spPr>
+        <p:txBody>
+          <a:bodyPr wrap="none">
+            <a:spAutoFit/>
+          </a:bodyPr>
+          <a:lstStyle/>
+          <a:p>
+            <a:pPr algn="ctr">
+              <a:defRPr sz="900" b="1">
                 <a:solidFill>
                   <a:srgbClr val="C00000"/>
                 </a:solidFill>
               </a:defRPr>
             </a:pPr>
             <a:r>
-              <a:t>41%</a:t>
+              <a:t>253</a:t>
+            </a:r>
+          </a:p>
+        </p:txBody>
+      </p:sp>
+      <p:sp>
+        <p:nvSpPr>
+          <p:cNvPr id="24" name="TextBox 23"/>
+          <p:cNvSpPr txBox="1"/>
+          <p:nvPr/>
+        </p:nvSpPr>
+        <p:spPr>
+          <a:xfrm>
+            <a:off x="3108960" y="2953512"/>
+            <a:ext cx="731520" cy="256032"/>
+          </a:xfrm>
+          <a:prstGeom prst="rect">
+            <a:avLst/>
+          </a:prstGeom>
+          <a:noFill/>
+        </p:spPr>
+        <p:txBody>
+          <a:bodyPr wrap="none">
+            <a:spAutoFit/>
+          </a:bodyPr>
+          <a:lstStyle/>
+          <a:p>
+            <a:pPr algn="ctr">
+              <a:defRPr sz="900" b="1">
+                <a:solidFill>
+                  <a:srgbClr val="C00000"/>
+                </a:solidFill>
+              </a:defRPr>
+            </a:pPr>
+            <a:r>
+              <a:t>679</a:t>
+            </a:r>
+          </a:p>
+        </p:txBody>
+      </p:sp>
+      <p:sp>
+        <p:nvSpPr>
+          <p:cNvPr id="25" name="TextBox 24"/>
+          <p:cNvSpPr txBox="1"/>
+          <p:nvPr/>
+        </p:nvSpPr>
+        <p:spPr>
+          <a:xfrm>
+            <a:off x="3840480" y="2953512"/>
+            <a:ext cx="731520" cy="256032"/>
+          </a:xfrm>
+          <a:prstGeom prst="rect">
+            <a:avLst/>
+          </a:prstGeom>
+          <a:noFill/>
+        </p:spPr>
+        <p:txBody>
+          <a:bodyPr wrap="none">
+            <a:spAutoFit/>
+          </a:bodyPr>
+          <a:lstStyle/>
+          <a:p>
+            <a:pPr algn="ctr">
+              <a:defRPr sz="900" b="1">
+                <a:solidFill>
+                  <a:srgbClr val="C00000"/>
+                </a:solidFill>
+              </a:defRPr>
+            </a:pPr>
+            <a:r>
+              <a:t>76.9%</a:t>
+            </a:r>
+          </a:p>
+        </p:txBody>
+      </p:sp>
+      <p:sp>
+        <p:nvSpPr>
+          <p:cNvPr id="26" name="TextBox 25"/>
+          <p:cNvSpPr txBox="1"/>
+          <p:nvPr/>
+        </p:nvSpPr>
+        <p:spPr>
+          <a:xfrm>
+            <a:off x="457200" y="3209544"/>
+            <a:ext cx="1188720" cy="256032"/>
+          </a:xfrm>
+          <a:prstGeom prst="rect">
+            <a:avLst/>
+          </a:prstGeom>
+          <a:noFill/>
+        </p:spPr>
+        <p:txBody>
+          <a:bodyPr wrap="none">
+            <a:spAutoFit/>
+          </a:bodyPr>
+          <a:lstStyle/>
+          <a:p>
+            <a:pPr>
+              <a:defRPr sz="900"/>
+            </a:pPr>
+            <a:r>
+              <a:t>Row</a:t>
+            </a:r>
+          </a:p>
+        </p:txBody>
+      </p:sp>
+      <p:sp>
+        <p:nvSpPr>
+          <p:cNvPr id="27" name="TextBox 26"/>
+          <p:cNvSpPr txBox="1"/>
+          <p:nvPr/>
+        </p:nvSpPr>
+        <p:spPr>
+          <a:xfrm>
+            <a:off x="1645920" y="3209544"/>
+            <a:ext cx="731520" cy="256032"/>
+          </a:xfrm>
+          <a:prstGeom prst="rect">
+            <a:avLst/>
+          </a:prstGeom>
+          <a:noFill/>
+        </p:spPr>
+        <p:txBody>
+          <a:bodyPr wrap="none">
+            <a:spAutoFit/>
+          </a:bodyPr>
+          <a:lstStyle/>
+          <a:p>
+            <a:pPr algn="ctr">
+              <a:defRPr sz="900"/>
+            </a:pPr>
+            <a:r>
+              <a:t>45</a:t>
+            </a:r>
+          </a:p>
+        </p:txBody>
+      </p:sp>
+      <p:sp>
+        <p:nvSpPr>
+          <p:cNvPr id="28" name="TextBox 27"/>
+          <p:cNvSpPr txBox="1"/>
+          <p:nvPr/>
+        </p:nvSpPr>
+        <p:spPr>
+          <a:xfrm>
+            <a:off x="2377440" y="3209544"/>
+            <a:ext cx="731520" cy="256032"/>
+          </a:xfrm>
+          <a:prstGeom prst="rect">
+            <a:avLst/>
+          </a:prstGeom>
+          <a:noFill/>
+        </p:spPr>
+        <p:txBody>
+          <a:bodyPr wrap="none">
+            <a:spAutoFit/>
+          </a:bodyPr>
+          <a:lstStyle/>
+          <a:p>
+            <a:pPr algn="ctr">
+              <a:defRPr sz="900"/>
+            </a:pPr>
+            <a:r>
+              <a:t>32</a:t>
+            </a:r>
+          </a:p>
+        </p:txBody>
+      </p:sp>
+      <p:sp>
+        <p:nvSpPr>
+          <p:cNvPr id="29" name="TextBox 28"/>
+          <p:cNvSpPr txBox="1"/>
+          <p:nvPr/>
+        </p:nvSpPr>
+        <p:spPr>
+          <a:xfrm>
+            <a:off x="3108960" y="3209544"/>
+            <a:ext cx="731520" cy="256032"/>
+          </a:xfrm>
+          <a:prstGeom prst="rect">
+            <a:avLst/>
+          </a:prstGeom>
+          <a:noFill/>
+        </p:spPr>
+        <p:txBody>
+          <a:bodyPr wrap="none">
+            <a:spAutoFit/>
+          </a:bodyPr>
+          <a:lstStyle/>
+          <a:p>
+            <a:pPr algn="ctr">
+              <a:defRPr sz="900"/>
+            </a:pPr>
+            <a:r>
+              <a:t>77</a:t>
+            </a:r>
+          </a:p>
+        </p:txBody>
+      </p:sp>
+      <p:sp>
+        <p:nvSpPr>
+          <p:cNvPr id="30" name="TextBox 29"/>
+          <p:cNvSpPr txBox="1"/>
+          <p:nvPr/>
+        </p:nvSpPr>
+        <p:spPr>
+          <a:xfrm>
+            <a:off x="3840480" y="3209544"/>
+            <a:ext cx="731520" cy="256032"/>
+          </a:xfrm>
+          <a:prstGeom prst="rect">
+            <a:avLst/>
+          </a:prstGeom>
+          <a:noFill/>
+        </p:spPr>
+        <p:txBody>
+          <a:bodyPr wrap="none">
+            <a:spAutoFit/>
+          </a:bodyPr>
+          <a:lstStyle/>
+          <a:p>
+            <a:pPr algn="ctr">
+              <a:defRPr sz="900"/>
+            </a:pPr>
+            <a:r>
+              <a:t>8.7%</a:t>
+            </a:r>
+          </a:p>
+        </p:txBody>
+      </p:sp>
+      <p:sp>
+        <p:nvSpPr>
+          <p:cNvPr id="31" name="TextBox 30"/>
+          <p:cNvSpPr txBox="1"/>
+          <p:nvPr/>
+        </p:nvSpPr>
+        <p:spPr>
+          <a:xfrm>
+            <a:off x="457200" y="3465576"/>
+            <a:ext cx="1188720" cy="256032"/>
+          </a:xfrm>
+          <a:prstGeom prst="rect">
+            <a:avLst/>
+          </a:prstGeom>
+          <a:noFill/>
+        </p:spPr>
+        <p:txBody>
+          <a:bodyPr wrap="none">
+            <a:spAutoFit/>
+          </a:bodyPr>
+          <a:lstStyle/>
+          <a:p>
+            <a:pPr>
+              <a:defRPr sz="900"/>
+            </a:pPr>
+            <a:r>
+              <a:t>DQ</a:t>
+            </a:r>
+          </a:p>
+        </p:txBody>
+      </p:sp>
+      <p:sp>
+        <p:nvSpPr>
+          <p:cNvPr id="32" name="TextBox 31"/>
+          <p:cNvSpPr txBox="1"/>
+          <p:nvPr/>
+        </p:nvSpPr>
+        <p:spPr>
+          <a:xfrm>
+            <a:off x="1645920" y="3465576"/>
+            <a:ext cx="731520" cy="256032"/>
+          </a:xfrm>
+          <a:prstGeom prst="rect">
+            <a:avLst/>
+          </a:prstGeom>
+          <a:noFill/>
+        </p:spPr>
+        <p:txBody>
+          <a:bodyPr wrap="none">
+            <a:spAutoFit/>
+          </a:bodyPr>
+          <a:lstStyle/>
+          <a:p>
+            <a:pPr algn="ctr">
+              <a:defRPr sz="900"/>
+            </a:pPr>
+            <a:r>
+              <a:t>26</a:t>
+            </a:r>
+          </a:p>
+        </p:txBody>
+      </p:sp>
+      <p:sp>
+        <p:nvSpPr>
+          <p:cNvPr id="33" name="TextBox 32"/>
+          <p:cNvSpPr txBox="1"/>
+          <p:nvPr/>
+        </p:nvSpPr>
+        <p:spPr>
+          <a:xfrm>
+            <a:off x="2377440" y="3465576"/>
+            <a:ext cx="731520" cy="256032"/>
+          </a:xfrm>
+          <a:prstGeom prst="rect">
+            <a:avLst/>
+          </a:prstGeom>
+          <a:noFill/>
+        </p:spPr>
+        <p:txBody>
+          <a:bodyPr wrap="none">
+            <a:spAutoFit/>
+          </a:bodyPr>
+          <a:lstStyle/>
+          <a:p>
+            <a:pPr algn="ctr">
+              <a:defRPr sz="900"/>
+            </a:pPr>
+            <a:r>
+              <a:t>17</a:t>
+            </a:r>
+          </a:p>
+        </p:txBody>
+      </p:sp>
+      <p:sp>
+        <p:nvSpPr>
+          <p:cNvPr id="34" name="TextBox 33"/>
+          <p:cNvSpPr txBox="1"/>
+          <p:nvPr/>
+        </p:nvSpPr>
+        <p:spPr>
+          <a:xfrm>
+            <a:off x="3108960" y="3465576"/>
+            <a:ext cx="731520" cy="256032"/>
+          </a:xfrm>
+          <a:prstGeom prst="rect">
+            <a:avLst/>
+          </a:prstGeom>
+          <a:noFill/>
+        </p:spPr>
+        <p:txBody>
+          <a:bodyPr wrap="none">
+            <a:spAutoFit/>
+          </a:bodyPr>
+          <a:lstStyle/>
+          <a:p>
+            <a:pPr algn="ctr">
+              <a:defRPr sz="900"/>
+            </a:pPr>
+            <a:r>
+              <a:t>43</a:t>
+            </a:r>
+          </a:p>
+        </p:txBody>
+      </p:sp>
+      <p:sp>
+        <p:nvSpPr>
+          <p:cNvPr id="35" name="TextBox 34"/>
+          <p:cNvSpPr txBox="1"/>
+          <p:nvPr/>
+        </p:nvSpPr>
+        <p:spPr>
+          <a:xfrm>
+            <a:off x="3840480" y="3465576"/>
+            <a:ext cx="731520" cy="256032"/>
+          </a:xfrm>
+          <a:prstGeom prst="rect">
+            <a:avLst/>
+          </a:prstGeom>
+          <a:noFill/>
+        </p:spPr>
+        <p:txBody>
+          <a:bodyPr wrap="none">
+            <a:spAutoFit/>
+          </a:bodyPr>
+          <a:lstStyle/>
+          <a:p>
+            <a:pPr algn="ctr">
+              <a:defRPr sz="900"/>
+            </a:pPr>
+            <a:r>
+              <a:t>4.9%</a:t>
+            </a:r>
+          </a:p>
+        </p:txBody>
+      </p:sp>
+      <p:sp>
+        <p:nvSpPr>
+          <p:cNvPr id="36" name="TextBox 35"/>
+          <p:cNvSpPr txBox="1"/>
+          <p:nvPr/>
+        </p:nvSpPr>
+        <p:spPr>
+          <a:xfrm>
+            <a:off x="457200" y="3721608"/>
+            <a:ext cx="1188720" cy="256032"/>
+          </a:xfrm>
+          <a:prstGeom prst="rect">
+            <a:avLst/>
+          </a:prstGeom>
+          <a:noFill/>
+        </p:spPr>
+        <p:txBody>
+          <a:bodyPr wrap="none">
+            <a:spAutoFit/>
+          </a:bodyPr>
+          <a:lstStyle/>
+          <a:p>
+            <a:pPr>
+              <a:defRPr sz="900"/>
+            </a:pPr>
+            <a:r>
+              <a:t>Hang</a:t>
+            </a:r>
+          </a:p>
+        </p:txBody>
+      </p:sp>
+      <p:sp>
+        <p:nvSpPr>
+          <p:cNvPr id="37" name="TextBox 36"/>
+          <p:cNvSpPr txBox="1"/>
+          <p:nvPr/>
+        </p:nvSpPr>
+        <p:spPr>
+          <a:xfrm>
+            <a:off x="1645920" y="3721608"/>
+            <a:ext cx="731520" cy="256032"/>
+          </a:xfrm>
+          <a:prstGeom prst="rect">
+            <a:avLst/>
+          </a:prstGeom>
+          <a:noFill/>
+        </p:spPr>
+        <p:txBody>
+          <a:bodyPr wrap="none">
+            <a:spAutoFit/>
+          </a:bodyPr>
+          <a:lstStyle/>
+          <a:p>
+            <a:pPr algn="ctr">
+              <a:defRPr sz="900"/>
+            </a:pPr>
+            <a:r>
+              <a:t>34</a:t>
+            </a:r>
+          </a:p>
+        </p:txBody>
+      </p:sp>
+      <p:sp>
+        <p:nvSpPr>
+          <p:cNvPr id="38" name="TextBox 37"/>
+          <p:cNvSpPr txBox="1"/>
+          <p:nvPr/>
+        </p:nvSpPr>
+        <p:spPr>
+          <a:xfrm>
+            <a:off x="2377440" y="3721608"/>
+            <a:ext cx="731520" cy="256032"/>
+          </a:xfrm>
+          <a:prstGeom prst="rect">
+            <a:avLst/>
+          </a:prstGeom>
+          <a:noFill/>
+        </p:spPr>
+        <p:txBody>
+          <a:bodyPr wrap="none">
+            <a:spAutoFit/>
+          </a:bodyPr>
+          <a:lstStyle/>
+          <a:p>
+            <a:pPr algn="ctr">
+              <a:defRPr sz="900"/>
+            </a:pPr>
+            <a:r>
+              <a:t>1</a:t>
+            </a:r>
+          </a:p>
+        </p:txBody>
+      </p:sp>
+      <p:sp>
+        <p:nvSpPr>
+          <p:cNvPr id="39" name="TextBox 38"/>
+          <p:cNvSpPr txBox="1"/>
+          <p:nvPr/>
+        </p:nvSpPr>
+        <p:spPr>
+          <a:xfrm>
+            <a:off x="3108960" y="3721608"/>
+            <a:ext cx="731520" cy="256032"/>
+          </a:xfrm>
+          <a:prstGeom prst="rect">
+            <a:avLst/>
+          </a:prstGeom>
+          <a:noFill/>
+        </p:spPr>
+        <p:txBody>
+          <a:bodyPr wrap="none">
+            <a:spAutoFit/>
+          </a:bodyPr>
+          <a:lstStyle/>
+          <a:p>
+            <a:pPr algn="ctr">
+              <a:defRPr sz="900"/>
+            </a:pPr>
+            <a:r>
+              <a:t>35</a:t>
+            </a:r>
+          </a:p>
+        </p:txBody>
+      </p:sp>
+      <p:sp>
+        <p:nvSpPr>
+          <p:cNvPr id="40" name="TextBox 39"/>
+          <p:cNvSpPr txBox="1"/>
+          <p:nvPr/>
+        </p:nvSpPr>
+        <p:spPr>
+          <a:xfrm>
+            <a:off x="3840480" y="3721608"/>
+            <a:ext cx="731520" cy="256032"/>
+          </a:xfrm>
+          <a:prstGeom prst="rect">
+            <a:avLst/>
+          </a:prstGeom>
+          <a:noFill/>
+        </p:spPr>
+        <p:txBody>
+          <a:bodyPr wrap="none">
+            <a:spAutoFit/>
+          </a:bodyPr>
+          <a:lstStyle/>
+          <a:p>
+            <a:pPr algn="ctr">
+              <a:defRPr sz="900"/>
+            </a:pPr>
+            <a:r>
+              <a:t>4.0%</a:t>
+            </a:r>
+          </a:p>
+        </p:txBody>
+      </p:sp>
+      <p:sp>
+        <p:nvSpPr>
+          <p:cNvPr id="41" name="TextBox 40"/>
+          <p:cNvSpPr txBox="1"/>
+          <p:nvPr/>
+        </p:nvSpPr>
+        <p:spPr>
+          <a:xfrm>
+            <a:off x="457200" y="3977640"/>
+            <a:ext cx="1188720" cy="256032"/>
+          </a:xfrm>
+          <a:prstGeom prst="rect">
+            <a:avLst/>
+          </a:prstGeom>
+          <a:noFill/>
+        </p:spPr>
+        <p:txBody>
+          <a:bodyPr wrap="none">
+            <a:spAutoFit/>
+          </a:bodyPr>
+          <a:lstStyle/>
+          <a:p>
+            <a:pPr>
+              <a:defRPr sz="900"/>
+            </a:pPr>
+            <a:r>
+              <a:t>Multi-DQ</a:t>
+            </a:r>
+          </a:p>
+        </p:txBody>
+      </p:sp>
+      <p:sp>
+        <p:nvSpPr>
+          <p:cNvPr id="42" name="TextBox 41"/>
+          <p:cNvSpPr txBox="1"/>
+          <p:nvPr/>
+        </p:nvSpPr>
+        <p:spPr>
+          <a:xfrm>
+            <a:off x="1645920" y="3977640"/>
+            <a:ext cx="731520" cy="256032"/>
+          </a:xfrm>
+          <a:prstGeom prst="rect">
+            <a:avLst/>
+          </a:prstGeom>
+          <a:noFill/>
+        </p:spPr>
+        <p:txBody>
+          <a:bodyPr wrap="none">
+            <a:spAutoFit/>
+          </a:bodyPr>
+          <a:lstStyle/>
+          <a:p>
+            <a:pPr algn="ctr">
+              <a:defRPr sz="900"/>
+            </a:pPr>
+            <a:r>
+              <a:t>14</a:t>
+            </a:r>
+          </a:p>
+        </p:txBody>
+      </p:sp>
+      <p:sp>
+        <p:nvSpPr>
+          <p:cNvPr id="43" name="TextBox 42"/>
+          <p:cNvSpPr txBox="1"/>
+          <p:nvPr/>
+        </p:nvSpPr>
+        <p:spPr>
+          <a:xfrm>
+            <a:off x="2377440" y="3977640"/>
+            <a:ext cx="731520" cy="256032"/>
+          </a:xfrm>
+          <a:prstGeom prst="rect">
+            <a:avLst/>
+          </a:prstGeom>
+          <a:noFill/>
+        </p:spPr>
+        <p:txBody>
+          <a:bodyPr wrap="none">
+            <a:spAutoFit/>
+          </a:bodyPr>
+          <a:lstStyle/>
+          <a:p>
+            <a:pPr algn="ctr">
+              <a:defRPr sz="900"/>
+            </a:pPr>
+            <a:r>
+              <a:t>14</a:t>
+            </a:r>
+          </a:p>
+        </p:txBody>
+      </p:sp>
+      <p:sp>
+        <p:nvSpPr>
+          <p:cNvPr id="44" name="TextBox 43"/>
+          <p:cNvSpPr txBox="1"/>
+          <p:nvPr/>
+        </p:nvSpPr>
+        <p:spPr>
+          <a:xfrm>
+            <a:off x="3108960" y="3977640"/>
+            <a:ext cx="731520" cy="256032"/>
+          </a:xfrm>
+          <a:prstGeom prst="rect">
+            <a:avLst/>
+          </a:prstGeom>
+          <a:noFill/>
+        </p:spPr>
+        <p:txBody>
+          <a:bodyPr wrap="none">
+            <a:spAutoFit/>
+          </a:bodyPr>
+          <a:lstStyle/>
+          <a:p>
+            <a:pPr algn="ctr">
+              <a:defRPr sz="900"/>
+            </a:pPr>
+            <a:r>
+              <a:t>28</a:t>
+            </a:r>
+          </a:p>
+        </p:txBody>
+      </p:sp>
+      <p:sp>
+        <p:nvSpPr>
+          <p:cNvPr id="45" name="TextBox 44"/>
+          <p:cNvSpPr txBox="1"/>
+          <p:nvPr/>
+        </p:nvSpPr>
+        <p:spPr>
+          <a:xfrm>
+            <a:off x="3840480" y="3977640"/>
+            <a:ext cx="731520" cy="256032"/>
+          </a:xfrm>
+          <a:prstGeom prst="rect">
+            <a:avLst/>
+          </a:prstGeom>
+          <a:noFill/>
+        </p:spPr>
+        <p:txBody>
+          <a:bodyPr wrap="none">
+            <a:spAutoFit/>
+          </a:bodyPr>
+          <a:lstStyle/>
+          <a:p>
+            <a:pPr algn="ctr">
+              <a:defRPr sz="900"/>
+            </a:pPr>
+            <a:r>
+              <a:t>3.2%</a:t>
+            </a:r>
+          </a:p>
+        </p:txBody>
+      </p:sp>
+      <p:sp>
+        <p:nvSpPr>
+          <p:cNvPr id="46" name="TextBox 45"/>
+          <p:cNvSpPr txBox="1"/>
+          <p:nvPr/>
+        </p:nvSpPr>
+        <p:spPr>
+          <a:xfrm>
+            <a:off x="457200" y="4233672"/>
+            <a:ext cx="1188720" cy="256032"/>
+          </a:xfrm>
+          <a:prstGeom prst="rect">
+            <a:avLst/>
+          </a:prstGeom>
+          <a:noFill/>
+        </p:spPr>
+        <p:txBody>
+          <a:bodyPr wrap="none">
+            <a:spAutoFit/>
+          </a:bodyPr>
+          <a:lstStyle/>
+          <a:p>
+            <a:pPr>
+              <a:defRPr sz="900"/>
+            </a:pPr>
+            <a:r>
+              <a:t>SB_Int</a:t>
+            </a:r>
+          </a:p>
+        </p:txBody>
+      </p:sp>
+      <p:sp>
+        <p:nvSpPr>
+          <p:cNvPr id="47" name="TextBox 46"/>
+          <p:cNvSpPr txBox="1"/>
+          <p:nvPr/>
+        </p:nvSpPr>
+        <p:spPr>
+          <a:xfrm>
+            <a:off x="1645920" y="4233672"/>
+            <a:ext cx="731520" cy="256032"/>
+          </a:xfrm>
+          <a:prstGeom prst="rect">
+            <a:avLst/>
+          </a:prstGeom>
+          <a:noFill/>
+        </p:spPr>
+        <p:txBody>
+          <a:bodyPr wrap="none">
+            <a:spAutoFit/>
+          </a:bodyPr>
+          <a:lstStyle/>
+          <a:p>
+            <a:pPr algn="ctr">
+              <a:defRPr sz="900"/>
+            </a:pPr>
+            <a:r>
+              <a:t>8</a:t>
+            </a:r>
+          </a:p>
+        </p:txBody>
+      </p:sp>
+      <p:sp>
+        <p:nvSpPr>
+          <p:cNvPr id="48" name="TextBox 47"/>
+          <p:cNvSpPr txBox="1"/>
+          <p:nvPr/>
+        </p:nvSpPr>
+        <p:spPr>
+          <a:xfrm>
+            <a:off x="2377440" y="4233672"/>
+            <a:ext cx="731520" cy="256032"/>
+          </a:xfrm>
+          <a:prstGeom prst="rect">
+            <a:avLst/>
+          </a:prstGeom>
+          <a:noFill/>
+        </p:spPr>
+        <p:txBody>
+          <a:bodyPr wrap="none">
+            <a:spAutoFit/>
+          </a:bodyPr>
+          <a:lstStyle/>
+          <a:p>
+            <a:pPr algn="ctr">
+              <a:defRPr sz="900"/>
+            </a:pPr>
+            <a:r>
+              <a:t>4</a:t>
             </a:r>
           </a:p>
         </p:txBody>
@@ -4751,8 +4767,70 @@
         </p:nvSpPr>
         <p:spPr>
           <a:xfrm>
-            <a:off x="4572000" y="3657600"/>
-            <a:ext cx="2286000" cy="274320"/>
+            <a:off x="3108960" y="4233672"/>
+            <a:ext cx="731520" cy="256032"/>
+          </a:xfrm>
+          <a:prstGeom prst="rect">
+            <a:avLst/>
+          </a:prstGeom>
+          <a:noFill/>
+        </p:spPr>
+        <p:txBody>
+          <a:bodyPr wrap="none">
+            <a:spAutoFit/>
+          </a:bodyPr>
+          <a:lstStyle/>
+          <a:p>
+            <a:pPr algn="ctr">
+              <a:defRPr sz="900"/>
+            </a:pPr>
+            <a:r>
+              <a:t>12</a:t>
+            </a:r>
+          </a:p>
+        </p:txBody>
+      </p:sp>
+      <p:sp>
+        <p:nvSpPr>
+          <p:cNvPr id="50" name="TextBox 49"/>
+          <p:cNvSpPr txBox="1"/>
+          <p:nvPr/>
+        </p:nvSpPr>
+        <p:spPr>
+          <a:xfrm>
+            <a:off x="3840480" y="4233672"/>
+            <a:ext cx="731520" cy="256032"/>
+          </a:xfrm>
+          <a:prstGeom prst="rect">
+            <a:avLst/>
+          </a:prstGeom>
+          <a:noFill/>
+        </p:spPr>
+        <p:txBody>
+          <a:bodyPr wrap="none">
+            <a:spAutoFit/>
+          </a:bodyPr>
+          <a:lstStyle/>
+          <a:p>
+            <a:pPr algn="ctr">
+              <a:defRPr sz="900"/>
+            </a:pPr>
+            <a:r>
+              <a:t>1.4%</a:t>
+            </a:r>
+          </a:p>
+        </p:txBody>
+      </p:sp>
+      <p:sp>
+        <p:nvSpPr>
+          <p:cNvPr id="51" name="TextBox 50"/>
+          <p:cNvSpPr txBox="1"/>
+          <p:nvPr/>
+        </p:nvSpPr>
+        <p:spPr>
+          <a:xfrm>
+            <a:off x="5029200" y="2377440"/>
+            <a:ext cx="6400800" cy="365760"/>
           </a:xfrm>
           <a:prstGeom prst="rect">
             <a:avLst/>
@@ -4766,783 +4844,37 @@
           <a:lstStyle/>
           <a:p>
             <a:pPr>
-              <a:defRPr sz="1000"/>
-            </a:pPr>
-            <a:r>
-              <a:t>SINGLE_BURST_SINGLE_ROW</a:t>
-            </a:r>
-          </a:p>
-        </p:txBody>
-      </p:sp>
-      <p:sp>
-        <p:nvSpPr>
-          <p:cNvPr id="50" name="TextBox 49"/>
-          <p:cNvSpPr txBox="1"/>
-          <p:nvPr/>
-        </p:nvSpPr>
-        <p:spPr>
-          <a:xfrm>
-            <a:off x="6858000" y="3657600"/>
-            <a:ext cx="731520" cy="274320"/>
-          </a:xfrm>
-          <a:prstGeom prst="rect">
-            <a:avLst/>
-          </a:prstGeom>
-          <a:noFill/>
-        </p:spPr>
-        <p:txBody>
-          <a:bodyPr wrap="none">
-            <a:spAutoFit/>
-          </a:bodyPr>
-          <a:lstStyle/>
-          <a:p>
-            <a:pPr>
-              <a:defRPr sz="1000"/>
-            </a:pPr>
-            <a:r>
-              <a:t>56.7</a:t>
-            </a:r>
-          </a:p>
-        </p:txBody>
-      </p:sp>
-      <p:sp>
-        <p:nvSpPr>
-          <p:cNvPr id="51" name="TextBox 50"/>
-          <p:cNvSpPr txBox="1"/>
-          <p:nvPr/>
-        </p:nvSpPr>
-        <p:spPr>
-          <a:xfrm>
-            <a:off x="7589520" y="3657600"/>
-            <a:ext cx="731520" cy="274320"/>
-          </a:xfrm>
-          <a:prstGeom prst="rect">
-            <a:avLst/>
-          </a:prstGeom>
-          <a:noFill/>
-        </p:spPr>
-        <p:txBody>
-          <a:bodyPr wrap="none">
-            <a:spAutoFit/>
-          </a:bodyPr>
-          <a:lstStyle/>
-          <a:p>
-            <a:pPr>
-              <a:defRPr sz="1000"/>
-            </a:pPr>
-            <a:r>
-              <a:t>20%</a:t>
-            </a:r>
-          </a:p>
-        </p:txBody>
-      </p:sp>
-      <p:sp>
-        <p:nvSpPr>
-          <p:cNvPr id="52" name="TextBox 51"/>
-          <p:cNvSpPr txBox="1"/>
-          <p:nvPr/>
-        </p:nvSpPr>
-        <p:spPr>
-          <a:xfrm>
-            <a:off x="4572000" y="3931920"/>
-            <a:ext cx="2286000" cy="274320"/>
-          </a:xfrm>
-          <a:prstGeom prst="rect">
-            <a:avLst/>
-          </a:prstGeom>
-          <a:noFill/>
-        </p:spPr>
-        <p:txBody>
-          <a:bodyPr wrap="none">
-            <a:spAutoFit/>
-          </a:bodyPr>
-          <a:lstStyle/>
-          <a:p>
-            <a:pPr>
-              <a:defRPr sz="1000"/>
-            </a:pPr>
-            <a:r>
-              <a:t>HGDC</a:t>
-            </a:r>
-          </a:p>
-        </p:txBody>
-      </p:sp>
-      <p:sp>
-        <p:nvSpPr>
-          <p:cNvPr id="53" name="TextBox 52"/>
-          <p:cNvSpPr txBox="1"/>
-          <p:nvPr/>
-        </p:nvSpPr>
-        <p:spPr>
-          <a:xfrm>
-            <a:off x="6858000" y="3931920"/>
-            <a:ext cx="731520" cy="274320"/>
-          </a:xfrm>
-          <a:prstGeom prst="rect">
-            <a:avLst/>
-          </a:prstGeom>
-          <a:noFill/>
-        </p:spPr>
-        <p:txBody>
-          <a:bodyPr wrap="none">
-            <a:spAutoFit/>
-          </a:bodyPr>
-          <a:lstStyle/>
-          <a:p>
-            <a:pPr>
-              <a:defRPr sz="1000"/>
-            </a:pPr>
-            <a:r>
-              <a:t>41.0</a:t>
-            </a:r>
-          </a:p>
-        </p:txBody>
-      </p:sp>
-      <p:sp>
-        <p:nvSpPr>
-          <p:cNvPr id="54" name="TextBox 53"/>
-          <p:cNvSpPr txBox="1"/>
-          <p:nvPr/>
-        </p:nvSpPr>
-        <p:spPr>
-          <a:xfrm>
-            <a:off x="7589520" y="3931920"/>
-            <a:ext cx="731520" cy="274320"/>
-          </a:xfrm>
-          <a:prstGeom prst="rect">
-            <a:avLst/>
-          </a:prstGeom>
-          <a:noFill/>
-        </p:spPr>
-        <p:txBody>
-          <a:bodyPr wrap="none">
-            <a:spAutoFit/>
-          </a:bodyPr>
-          <a:lstStyle/>
-          <a:p>
-            <a:pPr>
-              <a:defRPr sz="1000"/>
-            </a:pPr>
-            <a:r>
-              <a:t>14%</a:t>
-            </a:r>
-          </a:p>
-        </p:txBody>
-      </p:sp>
-      <p:sp>
-        <p:nvSpPr>
-          <p:cNvPr id="55" name="TextBox 54"/>
-          <p:cNvSpPr txBox="1"/>
-          <p:nvPr/>
-        </p:nvSpPr>
-        <p:spPr>
-          <a:xfrm>
-            <a:off x="4572000" y="4206240"/>
-            <a:ext cx="2286000" cy="274320"/>
-          </a:xfrm>
-          <a:prstGeom prst="rect">
-            <a:avLst/>
-          </a:prstGeom>
-          <a:noFill/>
-        </p:spPr>
-        <p:txBody>
-          <a:bodyPr wrap="none">
-            <a:spAutoFit/>
-          </a:bodyPr>
-          <a:lstStyle/>
-          <a:p>
-            <a:pPr>
-              <a:defRPr sz="1000"/>
-            </a:pPr>
-            <a:r>
-              <a:t>HANG</a:t>
-            </a:r>
-          </a:p>
-        </p:txBody>
-      </p:sp>
-      <p:sp>
-        <p:nvSpPr>
-          <p:cNvPr id="56" name="TextBox 55"/>
-          <p:cNvSpPr txBox="1"/>
-          <p:nvPr/>
-        </p:nvSpPr>
-        <p:spPr>
-          <a:xfrm>
-            <a:off x="6858000" y="4206240"/>
-            <a:ext cx="731520" cy="274320"/>
-          </a:xfrm>
-          <a:prstGeom prst="rect">
-            <a:avLst/>
-          </a:prstGeom>
-          <a:noFill/>
-        </p:spPr>
-        <p:txBody>
-          <a:bodyPr wrap="none">
-            <a:spAutoFit/>
-          </a:bodyPr>
-          <a:lstStyle/>
-          <a:p>
-            <a:pPr>
-              <a:defRPr sz="1000"/>
-            </a:pPr>
-            <a:r>
-              <a:t>17.5</a:t>
-            </a:r>
-          </a:p>
-        </p:txBody>
-      </p:sp>
-      <p:sp>
-        <p:nvSpPr>
-          <p:cNvPr id="57" name="TextBox 56"/>
-          <p:cNvSpPr txBox="1"/>
-          <p:nvPr/>
-        </p:nvSpPr>
-        <p:spPr>
-          <a:xfrm>
-            <a:off x="7589520" y="4206240"/>
-            <a:ext cx="731520" cy="274320"/>
-          </a:xfrm>
-          <a:prstGeom prst="rect">
-            <a:avLst/>
-          </a:prstGeom>
-          <a:noFill/>
-        </p:spPr>
-        <p:txBody>
-          <a:bodyPr wrap="none">
-            <a:spAutoFit/>
-          </a:bodyPr>
-          <a:lstStyle/>
-          <a:p>
-            <a:pPr>
-              <a:defRPr sz="1000"/>
-            </a:pPr>
-            <a:r>
-              <a:t>6%</a:t>
-            </a:r>
-          </a:p>
-        </p:txBody>
-      </p:sp>
-      <p:sp>
-        <p:nvSpPr>
-          <p:cNvPr id="58" name="TextBox 57"/>
-          <p:cNvSpPr txBox="1"/>
-          <p:nvPr/>
-        </p:nvSpPr>
-        <p:spPr>
-          <a:xfrm>
-            <a:off x="4572000" y="4480560"/>
-            <a:ext cx="2286000" cy="274320"/>
-          </a:xfrm>
-          <a:prstGeom prst="rect">
-            <a:avLst/>
-          </a:prstGeom>
-          <a:noFill/>
-        </p:spPr>
-        <p:txBody>
-          <a:bodyPr wrap="none">
-            <a:spAutoFit/>
-          </a:bodyPr>
-          <a:lstStyle/>
-          <a:p>
-            <a:pPr>
-              <a:defRPr sz="1000"/>
-            </a:pPr>
-            <a:r>
-              <a:t>MULTI_HALFBANK_MULTI_DQ</a:t>
-            </a:r>
-          </a:p>
-        </p:txBody>
-      </p:sp>
-      <p:sp>
-        <p:nvSpPr>
-          <p:cNvPr id="59" name="TextBox 58"/>
-          <p:cNvSpPr txBox="1"/>
-          <p:nvPr/>
-        </p:nvSpPr>
-        <p:spPr>
-          <a:xfrm>
-            <a:off x="6858000" y="4480560"/>
-            <a:ext cx="731520" cy="274320"/>
-          </a:xfrm>
-          <a:prstGeom prst="rect">
-            <a:avLst/>
-          </a:prstGeom>
-          <a:noFill/>
-        </p:spPr>
-        <p:txBody>
-          <a:bodyPr wrap="none">
-            <a:spAutoFit/>
-          </a:bodyPr>
-          <a:lstStyle/>
-          <a:p>
-            <a:pPr>
-              <a:defRPr sz="1000"/>
-            </a:pPr>
-            <a:r>
-              <a:t>11.1</a:t>
-            </a:r>
-          </a:p>
-        </p:txBody>
-      </p:sp>
-      <p:sp>
-        <p:nvSpPr>
-          <p:cNvPr id="60" name="TextBox 59"/>
-          <p:cNvSpPr txBox="1"/>
-          <p:nvPr/>
-        </p:nvSpPr>
-        <p:spPr>
-          <a:xfrm>
-            <a:off x="7589520" y="4480560"/>
-            <a:ext cx="731520" cy="274320"/>
-          </a:xfrm>
-          <a:prstGeom prst="rect">
-            <a:avLst/>
-          </a:prstGeom>
-          <a:noFill/>
-        </p:spPr>
-        <p:txBody>
-          <a:bodyPr wrap="none">
-            <a:spAutoFit/>
-          </a:bodyPr>
-          <a:lstStyle/>
-          <a:p>
-            <a:pPr>
-              <a:defRPr sz="1000"/>
-            </a:pPr>
-            <a:r>
-              <a:t>4%</a:t>
-            </a:r>
-          </a:p>
-        </p:txBody>
-      </p:sp>
-      <p:sp>
-        <p:nvSpPr>
-          <p:cNvPr id="61" name="TextBox 60"/>
-          <p:cNvSpPr txBox="1"/>
-          <p:nvPr/>
-        </p:nvSpPr>
-        <p:spPr>
-          <a:xfrm>
-            <a:off x="457200" y="5029200"/>
-            <a:ext cx="7315200" cy="365760"/>
-          </a:xfrm>
-          <a:prstGeom prst="rect">
-            <a:avLst/>
-          </a:prstGeom>
-          <a:noFill/>
-        </p:spPr>
-        <p:txBody>
-          <a:bodyPr wrap="none">
-            <a:spAutoFit/>
-          </a:bodyPr>
-          <a:lstStyle/>
-          <a:p>
-            <a:pPr>
-              <a:defRPr sz="1600" b="1">
+              <a:defRPr sz="1400" b="1">
                 <a:solidFill>
                   <a:srgbClr val="003366"/>
                 </a:solidFill>
               </a:defRPr>
             </a:pPr>
             <a:r>
-              <a:t>What Causes Each MSN_STATUS? (Column = 100%)</a:t>
-            </a:r>
-          </a:p>
-        </p:txBody>
-      </p:sp>
-      <p:sp>
-        <p:nvSpPr>
-          <p:cNvPr id="62" name="TextBox 61"/>
-          <p:cNvSpPr txBox="1"/>
-          <p:nvPr/>
-        </p:nvSpPr>
-        <p:spPr>
-          <a:xfrm>
-            <a:off x="457200" y="5394960"/>
-            <a:ext cx="1371600" cy="274320"/>
-          </a:xfrm>
-          <a:prstGeom prst="rect">
-            <a:avLst/>
-          </a:prstGeom>
-          <a:noFill/>
-        </p:spPr>
-        <p:txBody>
-          <a:bodyPr wrap="none">
-            <a:spAutoFit/>
-          </a:bodyPr>
-          <a:lstStyle/>
-          <a:p>
-            <a:pPr>
-              <a:defRPr sz="1000" b="1"/>
-            </a:pPr>
-            <a:r>
-              <a:t>Mod-Sys (76%)</a:t>
-            </a:r>
-          </a:p>
-        </p:txBody>
-      </p:sp>
-      <p:sp>
-        <p:nvSpPr>
-          <p:cNvPr id="63" name="TextBox 62"/>
-          <p:cNvSpPr txBox="1"/>
-          <p:nvPr/>
-        </p:nvSpPr>
-        <p:spPr>
-          <a:xfrm>
-            <a:off x="1828800" y="5394960"/>
-            <a:ext cx="274320" cy="274320"/>
-          </a:xfrm>
-          <a:prstGeom prst="rect">
-            <a:avLst/>
-          </a:prstGeom>
-          <a:noFill/>
-        </p:spPr>
-        <p:txBody>
-          <a:bodyPr wrap="none">
-            <a:spAutoFit/>
-          </a:bodyPr>
-          <a:lstStyle/>
-          <a:p>
-            <a:pPr>
-              <a:defRPr sz="1000"/>
-            </a:pPr>
-            <a:r>
-              <a:t>→</a:t>
-            </a:r>
-          </a:p>
-        </p:txBody>
-      </p:sp>
-      <p:sp>
-        <p:nvSpPr>
-          <p:cNvPr id="64" name="TextBox 63"/>
-          <p:cNvSpPr txBox="1"/>
-          <p:nvPr/>
-        </p:nvSpPr>
-        <p:spPr>
-          <a:xfrm>
-            <a:off x="2103120" y="5394960"/>
-            <a:ext cx="5486400" cy="274320"/>
-          </a:xfrm>
-          <a:prstGeom prst="rect">
-            <a:avLst/>
-          </a:prstGeom>
-          <a:noFill/>
-        </p:spPr>
-        <p:txBody>
-          <a:bodyPr wrap="none">
-            <a:spAutoFit/>
-          </a:bodyPr>
-          <a:lstStyle/>
-          <a:p>
-            <a:pPr>
-              <a:defRPr sz="1000"/>
-            </a:pPr>
-            <a:r>
-              <a:t>MULTI_BANK_MULTI_DQ (51%) + SINGLE_BURST (18%) + HGDC (18%)</a:t>
-            </a:r>
-          </a:p>
-        </p:txBody>
-      </p:sp>
-      <p:sp>
-        <p:nvSpPr>
-          <p:cNvPr id="65" name="TextBox 64"/>
-          <p:cNvSpPr txBox="1"/>
-          <p:nvPr/>
-        </p:nvSpPr>
-        <p:spPr>
-          <a:xfrm>
-            <a:off x="457200" y="5715000"/>
-            <a:ext cx="1371600" cy="274320"/>
-          </a:xfrm>
-          <a:prstGeom prst="rect">
-            <a:avLst/>
-          </a:prstGeom>
-          <a:noFill/>
-        </p:spPr>
-        <p:txBody>
-          <a:bodyPr wrap="none">
-            <a:spAutoFit/>
-          </a:bodyPr>
-          <a:lstStyle/>
-          <a:p>
-            <a:pPr>
-              <a:defRPr sz="1000" b="1"/>
-            </a:pPr>
-            <a:r>
-              <a:t>Row (8%)</a:t>
-            </a:r>
-          </a:p>
-        </p:txBody>
-      </p:sp>
-      <p:sp>
-        <p:nvSpPr>
-          <p:cNvPr id="66" name="TextBox 65"/>
-          <p:cNvSpPr txBox="1"/>
-          <p:nvPr/>
-        </p:nvSpPr>
-        <p:spPr>
-          <a:xfrm>
-            <a:off x="1828800" y="5715000"/>
-            <a:ext cx="274320" cy="274320"/>
-          </a:xfrm>
-          <a:prstGeom prst="rect">
-            <a:avLst/>
-          </a:prstGeom>
-          <a:noFill/>
-        </p:spPr>
-        <p:txBody>
-          <a:bodyPr wrap="none">
-            <a:spAutoFit/>
-          </a:bodyPr>
-          <a:lstStyle/>
-          <a:p>
-            <a:pPr>
-              <a:defRPr sz="1000"/>
-            </a:pPr>
-            <a:r>
-              <a:t>→</a:t>
-            </a:r>
-          </a:p>
-        </p:txBody>
-      </p:sp>
-      <p:sp>
-        <p:nvSpPr>
-          <p:cNvPr id="67" name="TextBox 66"/>
-          <p:cNvSpPr txBox="1"/>
-          <p:nvPr/>
-        </p:nvSpPr>
-        <p:spPr>
-          <a:xfrm>
-            <a:off x="2103120" y="5715000"/>
-            <a:ext cx="5486400" cy="274320"/>
-          </a:xfrm>
-          <a:prstGeom prst="rect">
-            <a:avLst/>
-          </a:prstGeom>
-          <a:noFill/>
-        </p:spPr>
-        <p:txBody>
-          <a:bodyPr wrap="none">
-            <a:spAutoFit/>
-          </a:bodyPr>
-          <a:lstStyle/>
-          <a:p>
-            <a:pPr>
-              <a:defRPr sz="1000"/>
-            </a:pPr>
-            <a:r>
-              <a:t>SINGLE_BURST_SINGLE_ROW (73%) + DB (16%)</a:t>
-            </a:r>
-          </a:p>
-        </p:txBody>
-      </p:sp>
-      <p:sp>
-        <p:nvSpPr>
-          <p:cNvPr id="68" name="TextBox 67"/>
-          <p:cNvSpPr txBox="1"/>
-          <p:nvPr/>
-        </p:nvSpPr>
-        <p:spPr>
-          <a:xfrm>
-            <a:off x="457200" y="6035040"/>
-            <a:ext cx="1371600" cy="274320"/>
-          </a:xfrm>
-          <a:prstGeom prst="rect">
-            <a:avLst/>
-          </a:prstGeom>
-          <a:noFill/>
-        </p:spPr>
-        <p:txBody>
-          <a:bodyPr wrap="none">
-            <a:spAutoFit/>
-          </a:bodyPr>
-          <a:lstStyle/>
-          <a:p>
-            <a:pPr>
-              <a:defRPr sz="1000" b="1"/>
-            </a:pPr>
-            <a:r>
-              <a:t>Hang (6%)</a:t>
-            </a:r>
-          </a:p>
-        </p:txBody>
-      </p:sp>
-      <p:sp>
-        <p:nvSpPr>
-          <p:cNvPr id="69" name="TextBox 68"/>
-          <p:cNvSpPr txBox="1"/>
-          <p:nvPr/>
-        </p:nvSpPr>
-        <p:spPr>
-          <a:xfrm>
-            <a:off x="1828800" y="6035040"/>
-            <a:ext cx="274320" cy="274320"/>
-          </a:xfrm>
-          <a:prstGeom prst="rect">
-            <a:avLst/>
-          </a:prstGeom>
-          <a:noFill/>
-        </p:spPr>
-        <p:txBody>
-          <a:bodyPr wrap="none">
-            <a:spAutoFit/>
-          </a:bodyPr>
-          <a:lstStyle/>
-          <a:p>
-            <a:pPr>
-              <a:defRPr sz="1000"/>
-            </a:pPr>
-            <a:r>
-              <a:t>→</a:t>
-            </a:r>
-          </a:p>
-        </p:txBody>
-      </p:sp>
-      <p:sp>
-        <p:nvSpPr>
-          <p:cNvPr id="70" name="TextBox 69"/>
-          <p:cNvSpPr txBox="1"/>
-          <p:nvPr/>
-        </p:nvSpPr>
-        <p:spPr>
-          <a:xfrm>
-            <a:off x="2103120" y="6035040"/>
-            <a:ext cx="5486400" cy="274320"/>
-          </a:xfrm>
-          <a:prstGeom prst="rect">
-            <a:avLst/>
-          </a:prstGeom>
-          <a:noFill/>
-        </p:spPr>
-        <p:txBody>
-          <a:bodyPr wrap="none">
-            <a:spAutoFit/>
-          </a:bodyPr>
-          <a:lstStyle/>
-          <a:p>
-            <a:pPr>
-              <a:defRPr sz="1000"/>
-            </a:pPr>
-            <a:r>
-              <a:t>HANG (100%)</a:t>
-            </a:r>
-          </a:p>
-        </p:txBody>
-      </p:sp>
-      <p:sp>
-        <p:nvSpPr>
-          <p:cNvPr id="71" name="TextBox 70"/>
-          <p:cNvSpPr txBox="1"/>
-          <p:nvPr/>
-        </p:nvSpPr>
-        <p:spPr>
-          <a:xfrm>
-            <a:off x="457200" y="6355080"/>
-            <a:ext cx="1371600" cy="274320"/>
-          </a:xfrm>
-          <a:prstGeom prst="rect">
-            <a:avLst/>
-          </a:prstGeom>
-          <a:noFill/>
-        </p:spPr>
-        <p:txBody>
-          <a:bodyPr wrap="none">
-            <a:spAutoFit/>
-          </a:bodyPr>
-          <a:lstStyle/>
-          <a:p>
-            <a:pPr>
-              <a:defRPr sz="1000" b="1"/>
-            </a:pPr>
-            <a:r>
-              <a:t>DQ (5%)</a:t>
-            </a:r>
-          </a:p>
-        </p:txBody>
-      </p:sp>
-      <p:sp>
-        <p:nvSpPr>
-          <p:cNvPr id="72" name="TextBox 71"/>
-          <p:cNvSpPr txBox="1"/>
-          <p:nvPr/>
-        </p:nvSpPr>
-        <p:spPr>
-          <a:xfrm>
-            <a:off x="1828800" y="6355080"/>
-            <a:ext cx="274320" cy="274320"/>
-          </a:xfrm>
-          <a:prstGeom prst="rect">
-            <a:avLst/>
-          </a:prstGeom>
-          <a:noFill/>
-        </p:spPr>
-        <p:txBody>
-          <a:bodyPr wrap="none">
-            <a:spAutoFit/>
-          </a:bodyPr>
-          <a:lstStyle/>
-          <a:p>
-            <a:pPr>
-              <a:defRPr sz="1000"/>
-            </a:pPr>
-            <a:r>
-              <a:t>→</a:t>
-            </a:r>
-          </a:p>
-        </p:txBody>
-      </p:sp>
-      <p:sp>
-        <p:nvSpPr>
-          <p:cNvPr id="73" name="TextBox 72"/>
-          <p:cNvSpPr txBox="1"/>
-          <p:nvPr/>
-        </p:nvSpPr>
-        <p:spPr>
-          <a:xfrm>
-            <a:off x="2103120" y="6355080"/>
-            <a:ext cx="5486400" cy="274320"/>
-          </a:xfrm>
-          <a:prstGeom prst="rect">
-            <a:avLst/>
-          </a:prstGeom>
-          <a:noFill/>
-        </p:spPr>
-        <p:txBody>
-          <a:bodyPr wrap="none">
-            <a:spAutoFit/>
-          </a:bodyPr>
-          <a:lstStyle/>
-          <a:p>
-            <a:pPr>
-              <a:defRPr sz="1000"/>
-            </a:pPr>
-            <a:r>
-              <a:t>SYS_EVEN_BURST_BIT (50%) + MULTI_HALFBANK_SINGLE_DQ (31%)</a:t>
-            </a:r>
-          </a:p>
-        </p:txBody>
-      </p:sp>
-      <p:sp>
-        <p:nvSpPr>
-          <p:cNvPr id="74" name="Rounded Rectangle 73"/>
+              <a:t>FAILCRAWLER Pareto (Top 8)</a:t>
+            </a:r>
+          </a:p>
+        </p:txBody>
+      </p:sp>
+      <p:sp>
+        <p:nvSpPr>
+          <p:cNvPr id="52" name="Rectangle 51"/>
           <p:cNvSpPr/>
           <p:nvPr/>
         </p:nvSpPr>
         <p:spPr>
           <a:xfrm>
-            <a:off x="8686800" y="1463040"/>
-            <a:ext cx="3200400" cy="5029200"/>
-          </a:xfrm>
-          <a:prstGeom prst="roundRect">
+            <a:off x="5029200" y="2697480"/>
+            <a:ext cx="2560320" cy="256032"/>
+          </a:xfrm>
+          <a:prstGeom prst="rect">
             <a:avLst/>
           </a:prstGeom>
           <a:solidFill>
-            <a:srgbClr val="FFFAF0"/>
+            <a:srgbClr val="003366"/>
           </a:solidFill>
           <a:ln>
-            <a:solidFill>
-              <a:srgbClr val="FFA500"/>
-            </a:solidFill>
+            <a:noFill/>
           </a:ln>
         </p:spPr>
         <p:style>
@@ -5569,34 +4901,1686 @@
       </p:sp>
       <p:sp>
         <p:nvSpPr>
-          <p:cNvPr id="75" name="TextBox 74"/>
-          <p:cNvSpPr txBox="1"/>
-          <p:nvPr/>
-        </p:nvSpPr>
-        <p:spPr>
-          <a:xfrm>
-            <a:off x="8778240" y="1554480"/>
-            <a:ext cx="3017520" cy="365760"/>
-          </a:xfrm>
-          <a:prstGeom prst="rect">
-            <a:avLst/>
-          </a:prstGeom>
-          <a:noFill/>
-        </p:spPr>
-        <p:txBody>
-          <a:bodyPr wrap="none">
-            <a:spAutoFit/>
-          </a:bodyPr>
-          <a:lstStyle/>
-          <a:p>
-            <a:pPr>
-              <a:defRPr sz="1400" b="1">
+          <p:cNvPr id="53" name="TextBox 52"/>
+          <p:cNvSpPr txBox="1"/>
+          <p:nvPr/>
+        </p:nvSpPr>
+        <p:spPr>
+          <a:xfrm>
+            <a:off x="5029200" y="2697480"/>
+            <a:ext cx="2560320" cy="256032"/>
+          </a:xfrm>
+          <a:prstGeom prst="rect">
+            <a:avLst/>
+          </a:prstGeom>
+          <a:noFill/>
+        </p:spPr>
+        <p:txBody>
+          <a:bodyPr wrap="none">
+            <a:spAutoFit/>
+          </a:bodyPr>
+          <a:lstStyle/>
+          <a:p>
+            <a:pPr algn="ctr">
+              <a:defRPr sz="900" b="1">
                 <a:solidFill>
-                  <a:srgbClr val="CC6600"/>
+                  <a:srgbClr val="FFFFFF"/>
                 </a:solidFill>
               </a:defRPr>
             </a:pPr>
             <a:r>
+              <a:t>FAILCRAWLER</a:t>
+            </a:r>
+          </a:p>
+        </p:txBody>
+      </p:sp>
+      <p:sp>
+        <p:nvSpPr>
+          <p:cNvPr id="54" name="Rectangle 53"/>
+          <p:cNvSpPr/>
+          <p:nvPr/>
+        </p:nvSpPr>
+        <p:spPr>
+          <a:xfrm>
+            <a:off x="7589520" y="2697480"/>
+            <a:ext cx="731520" cy="256032"/>
+          </a:xfrm>
+          <a:prstGeom prst="rect">
+            <a:avLst/>
+          </a:prstGeom>
+          <a:solidFill>
+            <a:srgbClr val="003366"/>
+          </a:solidFill>
+          <a:ln>
+            <a:noFill/>
+          </a:ln>
+        </p:spPr>
+        <p:style>
+          <a:lnRef idx="1">
+            <a:schemeClr val="accent1"/>
+          </a:lnRef>
+          <a:fillRef idx="3">
+            <a:schemeClr val="accent1"/>
+          </a:fillRef>
+          <a:effectRef idx="2">
+            <a:schemeClr val="accent1"/>
+          </a:effectRef>
+          <a:fontRef idx="minor">
+            <a:schemeClr val="lt1"/>
+          </a:fontRef>
+        </p:style>
+        <p:txBody>
+          <a:bodyPr rtlCol="0" anchor="ctr"/>
+          <a:lstStyle/>
+          <a:p>
+            <a:pPr algn="ctr"/>
+          </a:p>
+        </p:txBody>
+      </p:sp>
+      <p:sp>
+        <p:nvSpPr>
+          <p:cNvPr id="55" name="TextBox 54"/>
+          <p:cNvSpPr txBox="1"/>
+          <p:nvPr/>
+        </p:nvSpPr>
+        <p:spPr>
+          <a:xfrm>
+            <a:off x="7589520" y="2697480"/>
+            <a:ext cx="731520" cy="256032"/>
+          </a:xfrm>
+          <a:prstGeom prst="rect">
+            <a:avLst/>
+          </a:prstGeom>
+          <a:noFill/>
+        </p:spPr>
+        <p:txBody>
+          <a:bodyPr wrap="none">
+            <a:spAutoFit/>
+          </a:bodyPr>
+          <a:lstStyle/>
+          <a:p>
+            <a:pPr algn="ctr">
+              <a:defRPr sz="900" b="1">
+                <a:solidFill>
+                  <a:srgbClr val="FFFFFF"/>
+                </a:solidFill>
+              </a:defRPr>
+            </a:pPr>
+            <a:r>
+              <a:t>HMB1</a:t>
+            </a:r>
+          </a:p>
+        </p:txBody>
+      </p:sp>
+      <p:sp>
+        <p:nvSpPr>
+          <p:cNvPr id="56" name="Rectangle 55"/>
+          <p:cNvSpPr/>
+          <p:nvPr/>
+        </p:nvSpPr>
+        <p:spPr>
+          <a:xfrm>
+            <a:off x="8321040" y="2697480"/>
+            <a:ext cx="731520" cy="256032"/>
+          </a:xfrm>
+          <a:prstGeom prst="rect">
+            <a:avLst/>
+          </a:prstGeom>
+          <a:solidFill>
+            <a:srgbClr val="003366"/>
+          </a:solidFill>
+          <a:ln>
+            <a:noFill/>
+          </a:ln>
+        </p:spPr>
+        <p:style>
+          <a:lnRef idx="1">
+            <a:schemeClr val="accent1"/>
+          </a:lnRef>
+          <a:fillRef idx="3">
+            <a:schemeClr val="accent1"/>
+          </a:fillRef>
+          <a:effectRef idx="2">
+            <a:schemeClr val="accent1"/>
+          </a:effectRef>
+          <a:fontRef idx="minor">
+            <a:schemeClr val="lt1"/>
+          </a:fontRef>
+        </p:style>
+        <p:txBody>
+          <a:bodyPr rtlCol="0" anchor="ctr"/>
+          <a:lstStyle/>
+          <a:p>
+            <a:pPr algn="ctr"/>
+          </a:p>
+        </p:txBody>
+      </p:sp>
+      <p:sp>
+        <p:nvSpPr>
+          <p:cNvPr id="57" name="TextBox 56"/>
+          <p:cNvSpPr txBox="1"/>
+          <p:nvPr/>
+        </p:nvSpPr>
+        <p:spPr>
+          <a:xfrm>
+            <a:off x="8321040" y="2697480"/>
+            <a:ext cx="731520" cy="256032"/>
+          </a:xfrm>
+          <a:prstGeom prst="rect">
+            <a:avLst/>
+          </a:prstGeom>
+          <a:noFill/>
+        </p:spPr>
+        <p:txBody>
+          <a:bodyPr wrap="none">
+            <a:spAutoFit/>
+          </a:bodyPr>
+          <a:lstStyle/>
+          <a:p>
+            <a:pPr algn="ctr">
+              <a:defRPr sz="900" b="1">
+                <a:solidFill>
+                  <a:srgbClr val="FFFFFF"/>
+                </a:solidFill>
+              </a:defRPr>
+            </a:pPr>
+            <a:r>
+              <a:t>QMON</a:t>
+            </a:r>
+          </a:p>
+        </p:txBody>
+      </p:sp>
+      <p:sp>
+        <p:nvSpPr>
+          <p:cNvPr id="58" name="Rectangle 57"/>
+          <p:cNvSpPr/>
+          <p:nvPr/>
+        </p:nvSpPr>
+        <p:spPr>
+          <a:xfrm>
+            <a:off x="9052559" y="2697480"/>
+            <a:ext cx="731520" cy="256032"/>
+          </a:xfrm>
+          <a:prstGeom prst="rect">
+            <a:avLst/>
+          </a:prstGeom>
+          <a:solidFill>
+            <a:srgbClr val="003366"/>
+          </a:solidFill>
+          <a:ln>
+            <a:noFill/>
+          </a:ln>
+        </p:spPr>
+        <p:style>
+          <a:lnRef idx="1">
+            <a:schemeClr val="accent1"/>
+          </a:lnRef>
+          <a:fillRef idx="3">
+            <a:schemeClr val="accent1"/>
+          </a:fillRef>
+          <a:effectRef idx="2">
+            <a:schemeClr val="accent1"/>
+          </a:effectRef>
+          <a:fontRef idx="minor">
+            <a:schemeClr val="lt1"/>
+          </a:fontRef>
+        </p:style>
+        <p:txBody>
+          <a:bodyPr rtlCol="0" anchor="ctr"/>
+          <a:lstStyle/>
+          <a:p>
+            <a:pPr algn="ctr"/>
+          </a:p>
+        </p:txBody>
+      </p:sp>
+      <p:sp>
+        <p:nvSpPr>
+          <p:cNvPr id="59" name="TextBox 58"/>
+          <p:cNvSpPr txBox="1"/>
+          <p:nvPr/>
+        </p:nvSpPr>
+        <p:spPr>
+          <a:xfrm>
+            <a:off x="9052559" y="2697480"/>
+            <a:ext cx="731520" cy="256032"/>
+          </a:xfrm>
+          <a:prstGeom prst="rect">
+            <a:avLst/>
+          </a:prstGeom>
+          <a:noFill/>
+        </p:spPr>
+        <p:txBody>
+          <a:bodyPr wrap="none">
+            <a:spAutoFit/>
+          </a:bodyPr>
+          <a:lstStyle/>
+          <a:p>
+            <a:pPr algn="ctr">
+              <a:defRPr sz="900" b="1">
+                <a:solidFill>
+                  <a:srgbClr val="FFFFFF"/>
+                </a:solidFill>
+              </a:defRPr>
+            </a:pPr>
+            <a:r>
+              <a:t>SLT</a:t>
+            </a:r>
+          </a:p>
+        </p:txBody>
+      </p:sp>
+      <p:sp>
+        <p:nvSpPr>
+          <p:cNvPr id="60" name="Rectangle 59"/>
+          <p:cNvSpPr/>
+          <p:nvPr/>
+        </p:nvSpPr>
+        <p:spPr>
+          <a:xfrm>
+            <a:off x="9784080" y="2697480"/>
+            <a:ext cx="731520" cy="256032"/>
+          </a:xfrm>
+          <a:prstGeom prst="rect">
+            <a:avLst/>
+          </a:prstGeom>
+          <a:solidFill>
+            <a:srgbClr val="003366"/>
+          </a:solidFill>
+          <a:ln>
+            <a:noFill/>
+          </a:ln>
+        </p:spPr>
+        <p:style>
+          <a:lnRef idx="1">
+            <a:schemeClr val="accent1"/>
+          </a:lnRef>
+          <a:fillRef idx="3">
+            <a:schemeClr val="accent1"/>
+          </a:fillRef>
+          <a:effectRef idx="2">
+            <a:schemeClr val="accent1"/>
+          </a:effectRef>
+          <a:fontRef idx="minor">
+            <a:schemeClr val="lt1"/>
+          </a:fontRef>
+        </p:style>
+        <p:txBody>
+          <a:bodyPr rtlCol="0" anchor="ctr"/>
+          <a:lstStyle/>
+          <a:p>
+            <a:pPr algn="ctr"/>
+          </a:p>
+        </p:txBody>
+      </p:sp>
+      <p:sp>
+        <p:nvSpPr>
+          <p:cNvPr id="61" name="TextBox 60"/>
+          <p:cNvSpPr txBox="1"/>
+          <p:nvPr/>
+        </p:nvSpPr>
+        <p:spPr>
+          <a:xfrm>
+            <a:off x="9784080" y="2697480"/>
+            <a:ext cx="731520" cy="256032"/>
+          </a:xfrm>
+          <a:prstGeom prst="rect">
+            <a:avLst/>
+          </a:prstGeom>
+          <a:noFill/>
+        </p:spPr>
+        <p:txBody>
+          <a:bodyPr wrap="none">
+            <a:spAutoFit/>
+          </a:bodyPr>
+          <a:lstStyle/>
+          <a:p>
+            <a:pPr algn="ctr">
+              <a:defRPr sz="900" b="1">
+                <a:solidFill>
+                  <a:srgbClr val="FFFFFF"/>
+                </a:solidFill>
+              </a:defRPr>
+            </a:pPr>
+            <a:r>
+              <a:t>% Share</a:t>
+            </a:r>
+          </a:p>
+        </p:txBody>
+      </p:sp>
+      <p:sp>
+        <p:nvSpPr>
+          <p:cNvPr id="62" name="TextBox 61"/>
+          <p:cNvSpPr txBox="1"/>
+          <p:nvPr/>
+        </p:nvSpPr>
+        <p:spPr>
+          <a:xfrm>
+            <a:off x="5029200" y="2953512"/>
+            <a:ext cx="2560320" cy="256032"/>
+          </a:xfrm>
+          <a:prstGeom prst="rect">
+            <a:avLst/>
+          </a:prstGeom>
+          <a:noFill/>
+        </p:spPr>
+        <p:txBody>
+          <a:bodyPr wrap="none">
+            <a:spAutoFit/>
+          </a:bodyPr>
+          <a:lstStyle/>
+          <a:p>
+            <a:pPr>
+              <a:defRPr sz="900" b="1">
+                <a:solidFill>
+                  <a:srgbClr val="C00000"/>
+                </a:solidFill>
+              </a:defRPr>
+            </a:pPr>
+            <a:r>
+              <a:t>MULTI_BANK_MULTI_DQ</a:t>
+            </a:r>
+          </a:p>
+        </p:txBody>
+      </p:sp>
+      <p:sp>
+        <p:nvSpPr>
+          <p:cNvPr id="63" name="TextBox 62"/>
+          <p:cNvSpPr txBox="1"/>
+          <p:nvPr/>
+        </p:nvSpPr>
+        <p:spPr>
+          <a:xfrm>
+            <a:off x="7589520" y="2953512"/>
+            <a:ext cx="731520" cy="256032"/>
+          </a:xfrm>
+          <a:prstGeom prst="rect">
+            <a:avLst/>
+          </a:prstGeom>
+          <a:noFill/>
+        </p:spPr>
+        <p:txBody>
+          <a:bodyPr wrap="none">
+            <a:spAutoFit/>
+          </a:bodyPr>
+          <a:lstStyle/>
+          <a:p>
+            <a:pPr algn="ctr">
+              <a:defRPr sz="900" b="1">
+                <a:solidFill>
+                  <a:srgbClr val="C00000"/>
+                </a:solidFill>
+              </a:defRPr>
+            </a:pPr>
+            <a:r>
+              <a:t>117.1</a:t>
+            </a:r>
+          </a:p>
+        </p:txBody>
+      </p:sp>
+      <p:sp>
+        <p:nvSpPr>
+          <p:cNvPr id="64" name="TextBox 63"/>
+          <p:cNvSpPr txBox="1"/>
+          <p:nvPr/>
+        </p:nvSpPr>
+        <p:spPr>
+          <a:xfrm>
+            <a:off x="8321040" y="2953512"/>
+            <a:ext cx="731520" cy="256032"/>
+          </a:xfrm>
+          <a:prstGeom prst="rect">
+            <a:avLst/>
+          </a:prstGeom>
+          <a:noFill/>
+        </p:spPr>
+        <p:txBody>
+          <a:bodyPr wrap="none">
+            <a:spAutoFit/>
+          </a:bodyPr>
+          <a:lstStyle/>
+          <a:p>
+            <a:pPr algn="ctr">
+              <a:defRPr sz="900" b="1">
+                <a:solidFill>
+                  <a:srgbClr val="C00000"/>
+                </a:solidFill>
+              </a:defRPr>
+            </a:pPr>
+            <a:r>
+              <a:t>112.4</a:t>
+            </a:r>
+          </a:p>
+        </p:txBody>
+      </p:sp>
+      <p:sp>
+        <p:nvSpPr>
+          <p:cNvPr id="65" name="TextBox 64"/>
+          <p:cNvSpPr txBox="1"/>
+          <p:nvPr/>
+        </p:nvSpPr>
+        <p:spPr>
+          <a:xfrm>
+            <a:off x="9052559" y="2953512"/>
+            <a:ext cx="731520" cy="256032"/>
+          </a:xfrm>
+          <a:prstGeom prst="rect">
+            <a:avLst/>
+          </a:prstGeom>
+          <a:noFill/>
+        </p:spPr>
+        <p:txBody>
+          <a:bodyPr wrap="none">
+            <a:spAutoFit/>
+          </a:bodyPr>
+          <a:lstStyle/>
+          <a:p>
+            <a:pPr algn="ctr">
+              <a:defRPr sz="900" b="1">
+                <a:solidFill>
+                  <a:srgbClr val="C00000"/>
+                </a:solidFill>
+              </a:defRPr>
+            </a:pPr>
+            <a:r>
+              <a:t>229.6</a:t>
+            </a:r>
+          </a:p>
+        </p:txBody>
+      </p:sp>
+      <p:sp>
+        <p:nvSpPr>
+          <p:cNvPr id="66" name="TextBox 65"/>
+          <p:cNvSpPr txBox="1"/>
+          <p:nvPr/>
+        </p:nvSpPr>
+        <p:spPr>
+          <a:xfrm>
+            <a:off x="9784080" y="2953512"/>
+            <a:ext cx="731520" cy="256032"/>
+          </a:xfrm>
+          <a:prstGeom prst="rect">
+            <a:avLst/>
+          </a:prstGeom>
+          <a:noFill/>
+        </p:spPr>
+        <p:txBody>
+          <a:bodyPr wrap="none">
+            <a:spAutoFit/>
+          </a:bodyPr>
+          <a:lstStyle/>
+          <a:p>
+            <a:pPr algn="ctr">
+              <a:defRPr sz="900" b="1">
+                <a:solidFill>
+                  <a:srgbClr val="C00000"/>
+                </a:solidFill>
+              </a:defRPr>
+            </a:pPr>
+            <a:r>
+              <a:t>48.0%</a:t>
+            </a:r>
+          </a:p>
+        </p:txBody>
+      </p:sp>
+      <p:sp>
+        <p:nvSpPr>
+          <p:cNvPr id="67" name="TextBox 66"/>
+          <p:cNvSpPr txBox="1"/>
+          <p:nvPr/>
+        </p:nvSpPr>
+        <p:spPr>
+          <a:xfrm>
+            <a:off x="5029200" y="3209544"/>
+            <a:ext cx="2560320" cy="256032"/>
+          </a:xfrm>
+          <a:prstGeom prst="rect">
+            <a:avLst/>
+          </a:prstGeom>
+          <a:noFill/>
+        </p:spPr>
+        <p:txBody>
+          <a:bodyPr wrap="none">
+            <a:spAutoFit/>
+          </a:bodyPr>
+          <a:lstStyle/>
+          <a:p>
+            <a:pPr>
+              <a:defRPr sz="900"/>
+            </a:pPr>
+            <a:r>
+              <a:t>SINGLE_BURST_SINGLE_ROW</a:t>
+            </a:r>
+          </a:p>
+        </p:txBody>
+      </p:sp>
+      <p:sp>
+        <p:nvSpPr>
+          <p:cNvPr id="68" name="TextBox 67"/>
+          <p:cNvSpPr txBox="1"/>
+          <p:nvPr/>
+        </p:nvSpPr>
+        <p:spPr>
+          <a:xfrm>
+            <a:off x="7589520" y="3209544"/>
+            <a:ext cx="731520" cy="256032"/>
+          </a:xfrm>
+          <a:prstGeom prst="rect">
+            <a:avLst/>
+          </a:prstGeom>
+          <a:noFill/>
+        </p:spPr>
+        <p:txBody>
+          <a:bodyPr wrap="none">
+            <a:spAutoFit/>
+          </a:bodyPr>
+          <a:lstStyle/>
+          <a:p>
+            <a:pPr algn="ctr">
+              <a:defRPr sz="900"/>
+            </a:pPr>
+            <a:r>
+              <a:t>56.7</a:t>
+            </a:r>
+          </a:p>
+        </p:txBody>
+      </p:sp>
+      <p:sp>
+        <p:nvSpPr>
+          <p:cNvPr id="69" name="TextBox 68"/>
+          <p:cNvSpPr txBox="1"/>
+          <p:nvPr/>
+        </p:nvSpPr>
+        <p:spPr>
+          <a:xfrm>
+            <a:off x="8321040" y="3209544"/>
+            <a:ext cx="731520" cy="256032"/>
+          </a:xfrm>
+          <a:prstGeom prst="rect">
+            <a:avLst/>
+          </a:prstGeom>
+          <a:noFill/>
+        </p:spPr>
+        <p:txBody>
+          <a:bodyPr wrap="none">
+            <a:spAutoFit/>
+          </a:bodyPr>
+          <a:lstStyle/>
+          <a:p>
+            <a:pPr algn="ctr">
+              <a:defRPr sz="900"/>
+            </a:pPr>
+            <a:r>
+              <a:t>25.3</a:t>
+            </a:r>
+          </a:p>
+        </p:txBody>
+      </p:sp>
+      <p:sp>
+        <p:nvSpPr>
+          <p:cNvPr id="70" name="TextBox 69"/>
+          <p:cNvSpPr txBox="1"/>
+          <p:nvPr/>
+        </p:nvSpPr>
+        <p:spPr>
+          <a:xfrm>
+            <a:off x="9052559" y="3209544"/>
+            <a:ext cx="731520" cy="256032"/>
+          </a:xfrm>
+          <a:prstGeom prst="rect">
+            <a:avLst/>
+          </a:prstGeom>
+          <a:noFill/>
+        </p:spPr>
+        <p:txBody>
+          <a:bodyPr wrap="none">
+            <a:spAutoFit/>
+          </a:bodyPr>
+          <a:lstStyle/>
+          <a:p>
+            <a:pPr algn="ctr">
+              <a:defRPr sz="900"/>
+            </a:pPr>
+            <a:r>
+              <a:t>82.0</a:t>
+            </a:r>
+          </a:p>
+        </p:txBody>
+      </p:sp>
+      <p:sp>
+        <p:nvSpPr>
+          <p:cNvPr id="71" name="TextBox 70"/>
+          <p:cNvSpPr txBox="1"/>
+          <p:nvPr/>
+        </p:nvSpPr>
+        <p:spPr>
+          <a:xfrm>
+            <a:off x="9784080" y="3209544"/>
+            <a:ext cx="731520" cy="256032"/>
+          </a:xfrm>
+          <a:prstGeom prst="rect">
+            <a:avLst/>
+          </a:prstGeom>
+          <a:noFill/>
+        </p:spPr>
+        <p:txBody>
+          <a:bodyPr wrap="none">
+            <a:spAutoFit/>
+          </a:bodyPr>
+          <a:lstStyle/>
+          <a:p>
+            <a:pPr algn="ctr">
+              <a:defRPr sz="900"/>
+            </a:pPr>
+            <a:r>
+              <a:t>17.2%</a:t>
+            </a:r>
+          </a:p>
+        </p:txBody>
+      </p:sp>
+      <p:sp>
+        <p:nvSpPr>
+          <p:cNvPr id="72" name="TextBox 71"/>
+          <p:cNvSpPr txBox="1"/>
+          <p:nvPr/>
+        </p:nvSpPr>
+        <p:spPr>
+          <a:xfrm>
+            <a:off x="5029200" y="3465576"/>
+            <a:ext cx="2560320" cy="256032"/>
+          </a:xfrm>
+          <a:prstGeom prst="rect">
+            <a:avLst/>
+          </a:prstGeom>
+          <a:noFill/>
+        </p:spPr>
+        <p:txBody>
+          <a:bodyPr wrap="none">
+            <a:spAutoFit/>
+          </a:bodyPr>
+          <a:lstStyle/>
+          <a:p>
+            <a:pPr>
+              <a:defRPr sz="900"/>
+            </a:pPr>
+            <a:r>
+              <a:t>HGDC</a:t>
+            </a:r>
+          </a:p>
+        </p:txBody>
+      </p:sp>
+      <p:sp>
+        <p:nvSpPr>
+          <p:cNvPr id="73" name="TextBox 72"/>
+          <p:cNvSpPr txBox="1"/>
+          <p:nvPr/>
+        </p:nvSpPr>
+        <p:spPr>
+          <a:xfrm>
+            <a:off x="7589520" y="3465576"/>
+            <a:ext cx="731520" cy="256032"/>
+          </a:xfrm>
+          <a:prstGeom prst="rect">
+            <a:avLst/>
+          </a:prstGeom>
+          <a:noFill/>
+        </p:spPr>
+        <p:txBody>
+          <a:bodyPr wrap="none">
+            <a:spAutoFit/>
+          </a:bodyPr>
+          <a:lstStyle/>
+          <a:p>
+            <a:pPr algn="ctr">
+              <a:defRPr sz="900"/>
+            </a:pPr>
+            <a:r>
+              <a:t>41.0</a:t>
+            </a:r>
+          </a:p>
+        </p:txBody>
+      </p:sp>
+      <p:sp>
+        <p:nvSpPr>
+          <p:cNvPr id="74" name="TextBox 73"/>
+          <p:cNvSpPr txBox="1"/>
+          <p:nvPr/>
+        </p:nvSpPr>
+        <p:spPr>
+          <a:xfrm>
+            <a:off x="8321040" y="3465576"/>
+            <a:ext cx="731520" cy="256032"/>
+          </a:xfrm>
+          <a:prstGeom prst="rect">
+            <a:avLst/>
+          </a:prstGeom>
+          <a:noFill/>
+        </p:spPr>
+        <p:txBody>
+          <a:bodyPr wrap="none">
+            <a:spAutoFit/>
+          </a:bodyPr>
+          <a:lstStyle/>
+          <a:p>
+            <a:pPr algn="ctr">
+              <a:defRPr sz="900"/>
+            </a:pPr>
+            <a:r>
+              <a:t>7.4</a:t>
+            </a:r>
+          </a:p>
+        </p:txBody>
+      </p:sp>
+      <p:sp>
+        <p:nvSpPr>
+          <p:cNvPr id="75" name="TextBox 74"/>
+          <p:cNvSpPr txBox="1"/>
+          <p:nvPr/>
+        </p:nvSpPr>
+        <p:spPr>
+          <a:xfrm>
+            <a:off x="9052559" y="3465576"/>
+            <a:ext cx="731520" cy="256032"/>
+          </a:xfrm>
+          <a:prstGeom prst="rect">
+            <a:avLst/>
+          </a:prstGeom>
+          <a:noFill/>
+        </p:spPr>
+        <p:txBody>
+          <a:bodyPr wrap="none">
+            <a:spAutoFit/>
+          </a:bodyPr>
+          <a:lstStyle/>
+          <a:p>
+            <a:pPr algn="ctr">
+              <a:defRPr sz="900"/>
+            </a:pPr>
+            <a:r>
+              <a:t>48.4</a:t>
+            </a:r>
+          </a:p>
+        </p:txBody>
+      </p:sp>
+      <p:sp>
+        <p:nvSpPr>
+          <p:cNvPr id="76" name="TextBox 75"/>
+          <p:cNvSpPr txBox="1"/>
+          <p:nvPr/>
+        </p:nvSpPr>
+        <p:spPr>
+          <a:xfrm>
+            <a:off x="9784080" y="3465576"/>
+            <a:ext cx="731520" cy="256032"/>
+          </a:xfrm>
+          <a:prstGeom prst="rect">
+            <a:avLst/>
+          </a:prstGeom>
+          <a:noFill/>
+        </p:spPr>
+        <p:txBody>
+          <a:bodyPr wrap="none">
+            <a:spAutoFit/>
+          </a:bodyPr>
+          <a:lstStyle/>
+          <a:p>
+            <a:pPr algn="ctr">
+              <a:defRPr sz="900"/>
+            </a:pPr>
+            <a:r>
+              <a:t>10.1%</a:t>
+            </a:r>
+          </a:p>
+        </p:txBody>
+      </p:sp>
+      <p:sp>
+        <p:nvSpPr>
+          <p:cNvPr id="77" name="TextBox 76"/>
+          <p:cNvSpPr txBox="1"/>
+          <p:nvPr/>
+        </p:nvSpPr>
+        <p:spPr>
+          <a:xfrm>
+            <a:off x="5029200" y="3721608"/>
+            <a:ext cx="2560320" cy="256032"/>
+          </a:xfrm>
+          <a:prstGeom prst="rect">
+            <a:avLst/>
+          </a:prstGeom>
+          <a:noFill/>
+        </p:spPr>
+        <p:txBody>
+          <a:bodyPr wrap="none">
+            <a:spAutoFit/>
+          </a:bodyPr>
+          <a:lstStyle/>
+          <a:p>
+            <a:pPr>
+              <a:defRPr sz="900"/>
+            </a:pPr>
+            <a:r>
+              <a:t>MULTI_HALFBANK_MULTI_DQ</a:t>
+            </a:r>
+          </a:p>
+        </p:txBody>
+      </p:sp>
+      <p:sp>
+        <p:nvSpPr>
+          <p:cNvPr id="78" name="TextBox 77"/>
+          <p:cNvSpPr txBox="1"/>
+          <p:nvPr/>
+        </p:nvSpPr>
+        <p:spPr>
+          <a:xfrm>
+            <a:off x="7589520" y="3721608"/>
+            <a:ext cx="731520" cy="256032"/>
+          </a:xfrm>
+          <a:prstGeom prst="rect">
+            <a:avLst/>
+          </a:prstGeom>
+          <a:noFill/>
+        </p:spPr>
+        <p:txBody>
+          <a:bodyPr wrap="none">
+            <a:spAutoFit/>
+          </a:bodyPr>
+          <a:lstStyle/>
+          <a:p>
+            <a:pPr algn="ctr">
+              <a:defRPr sz="900"/>
+            </a:pPr>
+            <a:r>
+              <a:t>11.1</a:t>
+            </a:r>
+          </a:p>
+        </p:txBody>
+      </p:sp>
+      <p:sp>
+        <p:nvSpPr>
+          <p:cNvPr id="79" name="TextBox 78"/>
+          <p:cNvSpPr txBox="1"/>
+          <p:nvPr/>
+        </p:nvSpPr>
+        <p:spPr>
+          <a:xfrm>
+            <a:off x="8321040" y="3721608"/>
+            <a:ext cx="731520" cy="256032"/>
+          </a:xfrm>
+          <a:prstGeom prst="rect">
+            <a:avLst/>
+          </a:prstGeom>
+          <a:noFill/>
+        </p:spPr>
+        <p:txBody>
+          <a:bodyPr wrap="none">
+            <a:spAutoFit/>
+          </a:bodyPr>
+          <a:lstStyle/>
+          <a:p>
+            <a:pPr algn="ctr">
+              <a:defRPr sz="900"/>
+            </a:pPr>
+            <a:r>
+              <a:t>8.2</a:t>
+            </a:r>
+          </a:p>
+        </p:txBody>
+      </p:sp>
+      <p:sp>
+        <p:nvSpPr>
+          <p:cNvPr id="80" name="TextBox 79"/>
+          <p:cNvSpPr txBox="1"/>
+          <p:nvPr/>
+        </p:nvSpPr>
+        <p:spPr>
+          <a:xfrm>
+            <a:off x="9052559" y="3721608"/>
+            <a:ext cx="731520" cy="256032"/>
+          </a:xfrm>
+          <a:prstGeom prst="rect">
+            <a:avLst/>
+          </a:prstGeom>
+          <a:noFill/>
+        </p:spPr>
+        <p:txBody>
+          <a:bodyPr wrap="none">
+            <a:spAutoFit/>
+          </a:bodyPr>
+          <a:lstStyle/>
+          <a:p>
+            <a:pPr algn="ctr">
+              <a:defRPr sz="900"/>
+            </a:pPr>
+            <a:r>
+              <a:t>19.3</a:t>
+            </a:r>
+          </a:p>
+        </p:txBody>
+      </p:sp>
+      <p:sp>
+        <p:nvSpPr>
+          <p:cNvPr id="81" name="TextBox 80"/>
+          <p:cNvSpPr txBox="1"/>
+          <p:nvPr/>
+        </p:nvSpPr>
+        <p:spPr>
+          <a:xfrm>
+            <a:off x="9784080" y="3721608"/>
+            <a:ext cx="731520" cy="256032"/>
+          </a:xfrm>
+          <a:prstGeom prst="rect">
+            <a:avLst/>
+          </a:prstGeom>
+          <a:noFill/>
+        </p:spPr>
+        <p:txBody>
+          <a:bodyPr wrap="none">
+            <a:spAutoFit/>
+          </a:bodyPr>
+          <a:lstStyle/>
+          <a:p>
+            <a:pPr algn="ctr">
+              <a:defRPr sz="900"/>
+            </a:pPr>
+            <a:r>
+              <a:t>4.0%</a:t>
+            </a:r>
+          </a:p>
+        </p:txBody>
+      </p:sp>
+      <p:sp>
+        <p:nvSpPr>
+          <p:cNvPr id="82" name="TextBox 81"/>
+          <p:cNvSpPr txBox="1"/>
+          <p:nvPr/>
+        </p:nvSpPr>
+        <p:spPr>
+          <a:xfrm>
+            <a:off x="5029200" y="3977640"/>
+            <a:ext cx="2560320" cy="256032"/>
+          </a:xfrm>
+          <a:prstGeom prst="rect">
+            <a:avLst/>
+          </a:prstGeom>
+          <a:noFill/>
+        </p:spPr>
+        <p:txBody>
+          <a:bodyPr wrap="none">
+            <a:spAutoFit/>
+          </a:bodyPr>
+          <a:lstStyle/>
+          <a:p>
+            <a:pPr>
+              <a:defRPr sz="900"/>
+            </a:pPr>
+            <a:r>
+              <a:t>HANG</a:t>
+            </a:r>
+          </a:p>
+        </p:txBody>
+      </p:sp>
+      <p:sp>
+        <p:nvSpPr>
+          <p:cNvPr id="83" name="TextBox 82"/>
+          <p:cNvSpPr txBox="1"/>
+          <p:nvPr/>
+        </p:nvSpPr>
+        <p:spPr>
+          <a:xfrm>
+            <a:off x="7589520" y="3977640"/>
+            <a:ext cx="731520" cy="256032"/>
+          </a:xfrm>
+          <a:prstGeom prst="rect">
+            <a:avLst/>
+          </a:prstGeom>
+          <a:noFill/>
+        </p:spPr>
+        <p:txBody>
+          <a:bodyPr wrap="none">
+            <a:spAutoFit/>
+          </a:bodyPr>
+          <a:lstStyle/>
+          <a:p>
+            <a:pPr algn="ctr">
+              <a:defRPr sz="900"/>
+            </a:pPr>
+            <a:r>
+              <a:t>17.5</a:t>
+            </a:r>
+          </a:p>
+        </p:txBody>
+      </p:sp>
+      <p:sp>
+        <p:nvSpPr>
+          <p:cNvPr id="84" name="TextBox 83"/>
+          <p:cNvSpPr txBox="1"/>
+          <p:nvPr/>
+        </p:nvSpPr>
+        <p:spPr>
+          <a:xfrm>
+            <a:off x="8321040" y="3977640"/>
+            <a:ext cx="731520" cy="256032"/>
+          </a:xfrm>
+          <a:prstGeom prst="rect">
+            <a:avLst/>
+          </a:prstGeom>
+          <a:noFill/>
+        </p:spPr>
+        <p:txBody>
+          <a:bodyPr wrap="none">
+            <a:spAutoFit/>
+          </a:bodyPr>
+          <a:lstStyle/>
+          <a:p>
+            <a:pPr algn="ctr">
+              <a:defRPr sz="900"/>
+            </a:pPr>
+            <a:r>
+              <a:t>0.6</a:t>
+            </a:r>
+          </a:p>
+        </p:txBody>
+      </p:sp>
+      <p:sp>
+        <p:nvSpPr>
+          <p:cNvPr id="85" name="TextBox 84"/>
+          <p:cNvSpPr txBox="1"/>
+          <p:nvPr/>
+        </p:nvSpPr>
+        <p:spPr>
+          <a:xfrm>
+            <a:off x="9052559" y="3977640"/>
+            <a:ext cx="731520" cy="256032"/>
+          </a:xfrm>
+          <a:prstGeom prst="rect">
+            <a:avLst/>
+          </a:prstGeom>
+          <a:noFill/>
+        </p:spPr>
+        <p:txBody>
+          <a:bodyPr wrap="none">
+            <a:spAutoFit/>
+          </a:bodyPr>
+          <a:lstStyle/>
+          <a:p>
+            <a:pPr algn="ctr">
+              <a:defRPr sz="900"/>
+            </a:pPr>
+            <a:r>
+              <a:t>18.0</a:t>
+            </a:r>
+          </a:p>
+        </p:txBody>
+      </p:sp>
+      <p:sp>
+        <p:nvSpPr>
+          <p:cNvPr id="86" name="TextBox 85"/>
+          <p:cNvSpPr txBox="1"/>
+          <p:nvPr/>
+        </p:nvSpPr>
+        <p:spPr>
+          <a:xfrm>
+            <a:off x="9784080" y="3977640"/>
+            <a:ext cx="731520" cy="256032"/>
+          </a:xfrm>
+          <a:prstGeom prst="rect">
+            <a:avLst/>
+          </a:prstGeom>
+          <a:noFill/>
+        </p:spPr>
+        <p:txBody>
+          <a:bodyPr wrap="none">
+            <a:spAutoFit/>
+          </a:bodyPr>
+          <a:lstStyle/>
+          <a:p>
+            <a:pPr algn="ctr">
+              <a:defRPr sz="900"/>
+            </a:pPr>
+            <a:r>
+              <a:t>3.8%</a:t>
+            </a:r>
+          </a:p>
+        </p:txBody>
+      </p:sp>
+      <p:sp>
+        <p:nvSpPr>
+          <p:cNvPr id="87" name="TextBox 86"/>
+          <p:cNvSpPr txBox="1"/>
+          <p:nvPr/>
+        </p:nvSpPr>
+        <p:spPr>
+          <a:xfrm>
+            <a:off x="5029200" y="4233672"/>
+            <a:ext cx="2560320" cy="256032"/>
+          </a:xfrm>
+          <a:prstGeom prst="rect">
+            <a:avLst/>
+          </a:prstGeom>
+          <a:noFill/>
+        </p:spPr>
+        <p:txBody>
+          <a:bodyPr wrap="none">
+            <a:spAutoFit/>
+          </a:bodyPr>
+          <a:lstStyle/>
+          <a:p>
+            <a:pPr>
+              <a:defRPr sz="900"/>
+            </a:pPr>
+            <a:r>
+              <a:t>SYS_EVEN_BURST_BIT</a:t>
+            </a:r>
+          </a:p>
+        </p:txBody>
+      </p:sp>
+      <p:sp>
+        <p:nvSpPr>
+          <p:cNvPr id="88" name="TextBox 87"/>
+          <p:cNvSpPr txBox="1"/>
+          <p:nvPr/>
+        </p:nvSpPr>
+        <p:spPr>
+          <a:xfrm>
+            <a:off x="7589520" y="4233672"/>
+            <a:ext cx="731520" cy="256032"/>
+          </a:xfrm>
+          <a:prstGeom prst="rect">
+            <a:avLst/>
+          </a:prstGeom>
+          <a:noFill/>
+        </p:spPr>
+        <p:txBody>
+          <a:bodyPr wrap="none">
+            <a:spAutoFit/>
+          </a:bodyPr>
+          <a:lstStyle/>
+          <a:p>
+            <a:pPr algn="ctr">
+              <a:defRPr sz="900"/>
+            </a:pPr>
+            <a:r>
+              <a:t>10.2</a:t>
+            </a:r>
+          </a:p>
+        </p:txBody>
+      </p:sp>
+      <p:sp>
+        <p:nvSpPr>
+          <p:cNvPr id="89" name="TextBox 88"/>
+          <p:cNvSpPr txBox="1"/>
+          <p:nvPr/>
+        </p:nvSpPr>
+        <p:spPr>
+          <a:xfrm>
+            <a:off x="8321040" y="4233672"/>
+            <a:ext cx="731520" cy="256032"/>
+          </a:xfrm>
+          <a:prstGeom prst="rect">
+            <a:avLst/>
+          </a:prstGeom>
+          <a:noFill/>
+        </p:spPr>
+        <p:txBody>
+          <a:bodyPr wrap="none">
+            <a:spAutoFit/>
+          </a:bodyPr>
+          <a:lstStyle/>
+          <a:p>
+            <a:pPr algn="ctr">
+              <a:defRPr sz="900"/>
+            </a:pPr>
+            <a:r>
+              <a:t>5.6</a:t>
+            </a:r>
+          </a:p>
+        </p:txBody>
+      </p:sp>
+      <p:sp>
+        <p:nvSpPr>
+          <p:cNvPr id="90" name="TextBox 89"/>
+          <p:cNvSpPr txBox="1"/>
+          <p:nvPr/>
+        </p:nvSpPr>
+        <p:spPr>
+          <a:xfrm>
+            <a:off x="9052559" y="4233672"/>
+            <a:ext cx="731520" cy="256032"/>
+          </a:xfrm>
+          <a:prstGeom prst="rect">
+            <a:avLst/>
+          </a:prstGeom>
+          <a:noFill/>
+        </p:spPr>
+        <p:txBody>
+          <a:bodyPr wrap="none">
+            <a:spAutoFit/>
+          </a:bodyPr>
+          <a:lstStyle/>
+          <a:p>
+            <a:pPr algn="ctr">
+              <a:defRPr sz="900"/>
+            </a:pPr>
+            <a:r>
+              <a:t>15.8</a:t>
+            </a:r>
+          </a:p>
+        </p:txBody>
+      </p:sp>
+      <p:sp>
+        <p:nvSpPr>
+          <p:cNvPr id="91" name="TextBox 90"/>
+          <p:cNvSpPr txBox="1"/>
+          <p:nvPr/>
+        </p:nvSpPr>
+        <p:spPr>
+          <a:xfrm>
+            <a:off x="9784080" y="4233672"/>
+            <a:ext cx="731520" cy="256032"/>
+          </a:xfrm>
+          <a:prstGeom prst="rect">
+            <a:avLst/>
+          </a:prstGeom>
+          <a:noFill/>
+        </p:spPr>
+        <p:txBody>
+          <a:bodyPr wrap="none">
+            <a:spAutoFit/>
+          </a:bodyPr>
+          <a:lstStyle/>
+          <a:p>
+            <a:pPr algn="ctr">
+              <a:defRPr sz="900"/>
+            </a:pPr>
+            <a:r>
+              <a:t>3.3%</a:t>
+            </a:r>
+          </a:p>
+        </p:txBody>
+      </p:sp>
+      <p:sp>
+        <p:nvSpPr>
+          <p:cNvPr id="92" name="TextBox 91"/>
+          <p:cNvSpPr txBox="1"/>
+          <p:nvPr/>
+        </p:nvSpPr>
+        <p:spPr>
+          <a:xfrm>
+            <a:off x="5029200" y="4489704"/>
+            <a:ext cx="2560320" cy="256032"/>
+          </a:xfrm>
+          <a:prstGeom prst="rect">
+            <a:avLst/>
+          </a:prstGeom>
+          <a:noFill/>
+        </p:spPr>
+        <p:txBody>
+          <a:bodyPr wrap="none">
+            <a:spAutoFit/>
+          </a:bodyPr>
+          <a:lstStyle/>
+          <a:p>
+            <a:pPr>
+              <a:defRPr sz="900"/>
+            </a:pPr>
+            <a:r>
+              <a:t>MULTI_HALFBANK_SINGLE_DQ</a:t>
+            </a:r>
+          </a:p>
+        </p:txBody>
+      </p:sp>
+      <p:sp>
+        <p:nvSpPr>
+          <p:cNvPr id="93" name="TextBox 92"/>
+          <p:cNvSpPr txBox="1"/>
+          <p:nvPr/>
+        </p:nvSpPr>
+        <p:spPr>
+          <a:xfrm>
+            <a:off x="7589520" y="4489704"/>
+            <a:ext cx="731520" cy="256032"/>
+          </a:xfrm>
+          <a:prstGeom prst="rect">
+            <a:avLst/>
+          </a:prstGeom>
+          <a:noFill/>
+        </p:spPr>
+        <p:txBody>
+          <a:bodyPr wrap="none">
+            <a:spAutoFit/>
+          </a:bodyPr>
+          <a:lstStyle/>
+          <a:p>
+            <a:pPr algn="ctr">
+              <a:defRPr sz="900"/>
+            </a:pPr>
+            <a:r>
+              <a:t>6.3</a:t>
+            </a:r>
+          </a:p>
+        </p:txBody>
+      </p:sp>
+      <p:sp>
+        <p:nvSpPr>
+          <p:cNvPr id="94" name="TextBox 93"/>
+          <p:cNvSpPr txBox="1"/>
+          <p:nvPr/>
+        </p:nvSpPr>
+        <p:spPr>
+          <a:xfrm>
+            <a:off x="8321040" y="4489704"/>
+            <a:ext cx="731520" cy="256032"/>
+          </a:xfrm>
+          <a:prstGeom prst="rect">
+            <a:avLst/>
+          </a:prstGeom>
+          <a:noFill/>
+        </p:spPr>
+        <p:txBody>
+          <a:bodyPr wrap="none">
+            <a:spAutoFit/>
+          </a:bodyPr>
+          <a:lstStyle/>
+          <a:p>
+            <a:pPr algn="ctr">
+              <a:defRPr sz="900"/>
+            </a:pPr>
+            <a:r>
+              <a:t>4.1</a:t>
+            </a:r>
+          </a:p>
+        </p:txBody>
+      </p:sp>
+      <p:sp>
+        <p:nvSpPr>
+          <p:cNvPr id="95" name="TextBox 94"/>
+          <p:cNvSpPr txBox="1"/>
+          <p:nvPr/>
+        </p:nvSpPr>
+        <p:spPr>
+          <a:xfrm>
+            <a:off x="9052559" y="4489704"/>
+            <a:ext cx="731520" cy="256032"/>
+          </a:xfrm>
+          <a:prstGeom prst="rect">
+            <a:avLst/>
+          </a:prstGeom>
+          <a:noFill/>
+        </p:spPr>
+        <p:txBody>
+          <a:bodyPr wrap="none">
+            <a:spAutoFit/>
+          </a:bodyPr>
+          <a:lstStyle/>
+          <a:p>
+            <a:pPr algn="ctr">
+              <a:defRPr sz="900"/>
+            </a:pPr>
+            <a:r>
+              <a:t>10.5</a:t>
+            </a:r>
+          </a:p>
+        </p:txBody>
+      </p:sp>
+      <p:sp>
+        <p:nvSpPr>
+          <p:cNvPr id="96" name="TextBox 95"/>
+          <p:cNvSpPr txBox="1"/>
+          <p:nvPr/>
+        </p:nvSpPr>
+        <p:spPr>
+          <a:xfrm>
+            <a:off x="9784080" y="4489704"/>
+            <a:ext cx="731520" cy="256032"/>
+          </a:xfrm>
+          <a:prstGeom prst="rect">
+            <a:avLst/>
+          </a:prstGeom>
+          <a:noFill/>
+        </p:spPr>
+        <p:txBody>
+          <a:bodyPr wrap="none">
+            <a:spAutoFit/>
+          </a:bodyPr>
+          <a:lstStyle/>
+          <a:p>
+            <a:pPr algn="ctr">
+              <a:defRPr sz="900"/>
+            </a:pPr>
+            <a:r>
+              <a:t>2.2%</a:t>
+            </a:r>
+          </a:p>
+        </p:txBody>
+      </p:sp>
+      <p:sp>
+        <p:nvSpPr>
+          <p:cNvPr id="97" name="TextBox 96"/>
+          <p:cNvSpPr txBox="1"/>
+          <p:nvPr/>
+        </p:nvSpPr>
+        <p:spPr>
+          <a:xfrm>
+            <a:off x="5029200" y="4745736"/>
+            <a:ext cx="2560320" cy="256032"/>
+          </a:xfrm>
+          <a:prstGeom prst="rect">
+            <a:avLst/>
+          </a:prstGeom>
+          <a:noFill/>
+        </p:spPr>
+        <p:txBody>
+          <a:bodyPr wrap="none">
+            <a:spAutoFit/>
+          </a:bodyPr>
+          <a:lstStyle/>
+          <a:p>
+            <a:pPr>
+              <a:defRPr sz="900"/>
+            </a:pPr>
+            <a:r>
+              <a:t>DB</a:t>
+            </a:r>
+          </a:p>
+        </p:txBody>
+      </p:sp>
+      <p:sp>
+        <p:nvSpPr>
+          <p:cNvPr id="98" name="TextBox 97"/>
+          <p:cNvSpPr txBox="1"/>
+          <p:nvPr/>
+        </p:nvSpPr>
+        <p:spPr>
+          <a:xfrm>
+            <a:off x="7589520" y="4745736"/>
+            <a:ext cx="731520" cy="256032"/>
+          </a:xfrm>
+          <a:prstGeom prst="rect">
+            <a:avLst/>
+          </a:prstGeom>
+          <a:noFill/>
+        </p:spPr>
+        <p:txBody>
+          <a:bodyPr wrap="none">
+            <a:spAutoFit/>
+          </a:bodyPr>
+          <a:lstStyle/>
+          <a:p>
+            <a:pPr algn="ctr">
+              <a:defRPr sz="900"/>
+            </a:pPr>
+            <a:r>
+              <a:t>3.9</a:t>
+            </a:r>
+          </a:p>
+        </p:txBody>
+      </p:sp>
+      <p:sp>
+        <p:nvSpPr>
+          <p:cNvPr id="99" name="TextBox 98"/>
+          <p:cNvSpPr txBox="1"/>
+          <p:nvPr/>
+        </p:nvSpPr>
+        <p:spPr>
+          <a:xfrm>
+            <a:off x="8321040" y="4745736"/>
+            <a:ext cx="731520" cy="256032"/>
+          </a:xfrm>
+          <a:prstGeom prst="rect">
+            <a:avLst/>
+          </a:prstGeom>
+          <a:noFill/>
+        </p:spPr>
+        <p:txBody>
+          <a:bodyPr wrap="none">
+            <a:spAutoFit/>
+          </a:bodyPr>
+          <a:lstStyle/>
+          <a:p>
+            <a:pPr algn="ctr">
+              <a:defRPr sz="900"/>
+            </a:pPr>
+            <a:r>
+              <a:t>4.8</a:t>
+            </a:r>
+          </a:p>
+        </p:txBody>
+      </p:sp>
+      <p:sp>
+        <p:nvSpPr>
+          <p:cNvPr id="100" name="TextBox 99"/>
+          <p:cNvSpPr txBox="1"/>
+          <p:nvPr/>
+        </p:nvSpPr>
+        <p:spPr>
+          <a:xfrm>
+            <a:off x="9052559" y="4745736"/>
+            <a:ext cx="731520" cy="256032"/>
+          </a:xfrm>
+          <a:prstGeom prst="rect">
+            <a:avLst/>
+          </a:prstGeom>
+          <a:noFill/>
+        </p:spPr>
+        <p:txBody>
+          <a:bodyPr wrap="none">
+            <a:spAutoFit/>
+          </a:bodyPr>
+          <a:lstStyle/>
+          <a:p>
+            <a:pPr algn="ctr">
+              <a:defRPr sz="900"/>
+            </a:pPr>
+            <a:r>
+              <a:t>8.7</a:t>
+            </a:r>
+          </a:p>
+        </p:txBody>
+      </p:sp>
+      <p:sp>
+        <p:nvSpPr>
+          <p:cNvPr id="101" name="TextBox 100"/>
+          <p:cNvSpPr txBox="1"/>
+          <p:nvPr/>
+        </p:nvSpPr>
+        <p:spPr>
+          <a:xfrm>
+            <a:off x="9784080" y="4745736"/>
+            <a:ext cx="731520" cy="256032"/>
+          </a:xfrm>
+          <a:prstGeom prst="rect">
+            <a:avLst/>
+          </a:prstGeom>
+          <a:noFill/>
+        </p:spPr>
+        <p:txBody>
+          <a:bodyPr wrap="none">
+            <a:spAutoFit/>
+          </a:bodyPr>
+          <a:lstStyle/>
+          <a:p>
+            <a:pPr algn="ctr">
+              <a:defRPr sz="900"/>
+            </a:pPr>
+            <a:r>
+              <a:t>1.8%</a:t>
+            </a:r>
+          </a:p>
+        </p:txBody>
+      </p:sp>
+      <p:sp>
+        <p:nvSpPr>
+          <p:cNvPr id="102" name="Rounded Rectangle 101"/>
+          <p:cNvSpPr/>
+          <p:nvPr/>
+        </p:nvSpPr>
+        <p:spPr>
+          <a:xfrm>
+            <a:off x="457200" y="4754880"/>
+            <a:ext cx="11247120" cy="1920240"/>
+          </a:xfrm>
+          <a:prstGeom prst="roundRect">
+            <a:avLst/>
+          </a:prstGeom>
+          <a:solidFill>
+            <a:srgbClr val="FFFFF0"/>
+          </a:solidFill>
+          <a:ln>
+            <a:solidFill>
+              <a:srgbClr val="C89600"/>
+            </a:solidFill>
+          </a:ln>
+        </p:spPr>
+        <p:style>
+          <a:lnRef idx="1">
+            <a:schemeClr val="accent1"/>
+          </a:lnRef>
+          <a:fillRef idx="3">
+            <a:schemeClr val="accent1"/>
+          </a:fillRef>
+          <a:effectRef idx="2">
+            <a:schemeClr val="accent1"/>
+          </a:effectRef>
+          <a:fontRef idx="minor">
+            <a:schemeClr val="lt1"/>
+          </a:fontRef>
+        </p:style>
+        <p:txBody>
+          <a:bodyPr rtlCol="0" anchor="ctr"/>
+          <a:lstStyle/>
+          <a:p>
+            <a:pPr algn="ctr"/>
+          </a:p>
+        </p:txBody>
+      </p:sp>
+      <p:sp>
+        <p:nvSpPr>
+          <p:cNvPr id="103" name="TextBox 102"/>
+          <p:cNvSpPr txBox="1"/>
+          <p:nvPr/>
+        </p:nvSpPr>
+        <p:spPr>
+          <a:xfrm>
+            <a:off x="548640" y="4846320"/>
+            <a:ext cx="10972800" cy="274320"/>
+          </a:xfrm>
+          <a:prstGeom prst="rect">
+            <a:avLst/>
+          </a:prstGeom>
+          <a:noFill/>
+        </p:spPr>
+        <p:txBody>
+          <a:bodyPr wrap="none">
+            <a:spAutoFit/>
+          </a:bodyPr>
+          <a:lstStyle/>
+          <a:p>
+            <a:pPr>
+              <a:defRPr sz="1200" b="1">
+                <a:solidFill>
+                  <a:srgbClr val="966400"/>
+                </a:solidFill>
+              </a:defRPr>
+            </a:pPr>
+            <a:r>
               <a:t>Key Insights</a:t>
             </a:r>
           </a:p>
@@ -5604,14 +6588,14 @@
       </p:sp>
       <p:sp>
         <p:nvSpPr>
-          <p:cNvPr id="76" name="TextBox 75"/>
-          <p:cNvSpPr txBox="1"/>
-          <p:nvPr/>
-        </p:nvSpPr>
-        <p:spPr>
-          <a:xfrm>
-            <a:off x="8778240" y="1920240"/>
-            <a:ext cx="3017520" cy="4389120"/>
+          <p:cNvPr id="104" name="TextBox 103"/>
+          <p:cNvSpPr txBox="1"/>
+          <p:nvPr/>
+        </p:nvSpPr>
+        <p:spPr>
+          <a:xfrm>
+            <a:off x="548640" y="5120640"/>
+            <a:ext cx="3657600" cy="1371600"/>
           </a:xfrm>
           <a:prstGeom prst="rect">
             <a:avLst/>
@@ -5623,113 +6607,122 @@
             <a:spAutoFit/>
           </a:bodyPr>
           <a:lstStyle/>
-          <a:p/>
           <a:p>
             <a:pPr>
-              <a:spcBef>
-                <a:spcPts val="200"/>
-              </a:spcBef>
+              <a:defRPr sz="1000" b="1"/>
+            </a:pPr>
+            <a:r>
+              <a:t>1. Mod-Sys dominates SLT (77%)</a:t>
+            </a:r>
+          </a:p>
+          <a:p>
+            <a:pPr>
               <a:defRPr sz="1000"/>
             </a:pPr>
             <a:r>
-              <a:t>1. Mod-Sys dominates</a:t>
-            </a:r>
-            <a:br/>
-            <a:r>
-              <a:t>   • 76% of all HMB1 fails</a:t>
-            </a:r>
-            <a:br/>
-            <a:r>
-              <a:t>   • 426 modules</a:t>
+              <a:t>   • HMB1: 426 modules | QMON: 253 modules</a:t>
             </a:r>
           </a:p>
           <a:p>
             <a:pPr>
-              <a:spcBef>
-                <a:spcPts val="200"/>
-              </a:spcBef>
               <a:defRPr sz="1000"/>
             </a:pPr>
-          </a:p>
+            <a:r>
+              <a:t>   • Total: 679 modules</a:t>
+            </a:r>
+          </a:p>
+        </p:txBody>
+      </p:sp>
+      <p:sp>
+        <p:nvSpPr>
+          <p:cNvPr id="105" name="TextBox 104"/>
+          <p:cNvSpPr txBox="1"/>
+          <p:nvPr/>
+        </p:nvSpPr>
+        <p:spPr>
+          <a:xfrm>
+            <a:off x="4297679" y="5120640"/>
+            <a:ext cx="3657600" cy="1371600"/>
+          </a:xfrm>
+          <a:prstGeom prst="rect">
+            <a:avLst/>
+          </a:prstGeom>
+          <a:noFill/>
+        </p:spPr>
+        <p:txBody>
+          <a:bodyPr wrap="square">
+            <a:spAutoFit/>
+          </a:bodyPr>
+          <a:lstStyle/>
           <a:p>
             <a:pPr>
-              <a:spcBef>
-                <a:spcPts val="200"/>
-              </a:spcBef>
+              <a:defRPr sz="1000" b="1"/>
+            </a:pPr>
+            <a:r>
+              <a:t>2. Top FAILCRAWLER: MULTI_BANK_MULTI_DQ (48%)</a:t>
+            </a:r>
+          </a:p>
+          <a:p>
+            <a:pPr>
               <a:defRPr sz="1000"/>
             </a:pPr>
             <a:r>
-              <a:t>2. Top FAILCRAWLER</a:t>
-            </a:r>
-            <a:br/>
-            <a:r>
-              <a:t>   • MULTI_BANK_MULTI_DQ</a:t>
-            </a:r>
-            <a:br/>
-            <a:r>
-              <a:t>   • 117 cDPM (41%)</a:t>
+              <a:t>   • HMB1: 117.1 cDPM | QMON: 112.4 cDPM</a:t>
             </a:r>
           </a:p>
           <a:p>
             <a:pPr>
-              <a:spcBef>
-                <a:spcPts val="200"/>
-              </a:spcBef>
               <a:defRPr sz="1000"/>
             </a:pPr>
-          </a:p>
+            <a:r>
+              <a:t>   • Total: 229.6 cDPM → BIOS 100% recoverable</a:t>
+            </a:r>
+          </a:p>
+        </p:txBody>
+      </p:sp>
+      <p:sp>
+        <p:nvSpPr>
+          <p:cNvPr id="106" name="TextBox 105"/>
+          <p:cNvSpPr txBox="1"/>
+          <p:nvPr/>
+        </p:nvSpPr>
+        <p:spPr>
+          <a:xfrm>
+            <a:off x="8046719" y="5120640"/>
+            <a:ext cx="3657600" cy="1371600"/>
+          </a:xfrm>
+          <a:prstGeom prst="rect">
+            <a:avLst/>
+          </a:prstGeom>
+          <a:noFill/>
+        </p:spPr>
+        <p:txBody>
+          <a:bodyPr wrap="square">
+            <a:spAutoFit/>
+          </a:bodyPr>
+          <a:lstStyle/>
           <a:p>
             <a:pPr>
-              <a:spcBef>
-                <a:spcPts val="200"/>
-              </a:spcBef>
+              <a:defRPr sz="1000" b="1"/>
+            </a:pPr>
+            <a:r>
+              <a:t>3. Recovery Potential: ~71%</a:t>
+            </a:r>
+          </a:p>
+          <a:p>
+            <a:pPr>
               <a:defRPr sz="1000"/>
             </a:pPr>
             <a:r>
-              <a:t>3. Mod-Sys Breakdown</a:t>
-            </a:r>
-            <a:br/>
-            <a:r>
-              <a:t>   • 51% MULTI_BANK_MULTI_DQ</a:t>
-            </a:r>
-            <a:br/>
-            <a:r>
-              <a:t>   • 18% SINGLE_BURST</a:t>
-            </a:r>
-            <a:br/>
-            <a:r>
-              <a:t>   • 18% HGDC</a:t>
+              <a:t>   • BIOS 100%: 229.6 cDPM</a:t>
             </a:r>
           </a:p>
           <a:p>
             <a:pPr>
-              <a:spcBef>
-                <a:spcPts val="200"/>
-              </a:spcBef>
               <a:defRPr sz="1000"/>
             </a:pPr>
-          </a:p>
-          <a:p>
-            <a:pPr>
-              <a:spcBef>
-                <a:spcPts val="200"/>
-              </a:spcBef>
-              <a:defRPr sz="1000"/>
-            </a:pPr>
-            <a:r>
-              <a:t>4. Recovery Potential</a:t>
-            </a:r>
-            <a:br/>
-            <a:r>
-              <a:t>   • ~87% of Mod-Sys is</a:t>
-            </a:r>
-            <a:br/>
-            <a:r>
-              <a:t>     BIOS recoverable</a:t>
-            </a:r>
-            <a:br/>
-            <a:r>
-              <a:t>   • HANG = 100% HW+SOP</a:t>
+            <a:r>
+              <a:t>   • BIOS 50%: 93.5 cDPM | HW+SOP: 18.0 cDPM</a:t>
             </a:r>
           </a:p>
         </p:txBody>
